--- a/Slide_Bao_Cao.pptx
+++ b/Slide_Bao_Cao.pptx
@@ -3316,26 +3316,29 @@
         </p:nvSpPr>
         <p:spPr>
           <a:xfrm>
-            <a:off x="1028700" y="3959207"/>
-            <a:ext cx="13147128" cy="850900"/>
+            <a:off x="3877368" y="3959207"/>
+            <a:ext cx="11210232" cy="3613297"/>
           </a:xfrm>
           <a:prstGeom prst="rect">
             <a:avLst/>
           </a:prstGeom>
         </p:spPr>
         <p:txBody>
-          <a:bodyPr lIns="0" tIns="0" rIns="0" bIns="0" rtlCol="0" anchor="t">
+          <a:bodyPr wrap="square" lIns="0" tIns="0" rIns="0" bIns="0" rtlCol="0" anchor="t">
             <a:spAutoFit/>
           </a:bodyPr>
           <a:lstStyle/>
           <a:p>
-            <a:pPr algn="r">
+            <a:pPr>
               <a:lnSpc>
                 <a:spcPts val="3199"/>
               </a:lnSpc>
+              <a:spcBef>
+                <a:spcPts val="3000"/>
+              </a:spcBef>
             </a:pPr>
             <a:r>
-              <a:rPr lang="en-US" sz="3999">
+              <a:rPr lang="en-US" sz="3999" dirty="0">
                 <a:solidFill>
                   <a:srgbClr val="F1F6F9"/>
                 </a:solidFill>
@@ -3344,55 +3347,20 @@
                 <a:cs typeface="Clear Sans"/>
                 <a:sym typeface="Clear Sans"/>
               </a:rPr>
-              <a:t> NGUYỄN HUỲNH ANH TÚ-2374802010536</a:t>
-            </a:r>
-          </a:p>
-          <a:p>
-            <a:pPr algn="r">
+              <a:t>NGUYỄN HUỲNH ANH TÚ – 2374802010536</a:t>
+            </a:r>
+          </a:p>
+          <a:p>
+            <a:pPr>
               <a:lnSpc>
                 <a:spcPts val="3199"/>
               </a:lnSpc>
+              <a:spcBef>
+                <a:spcPts val="3000"/>
+              </a:spcBef>
             </a:pPr>
-            <a:endParaRPr lang="en-US" sz="3999">
-              <a:solidFill>
-                <a:srgbClr val="F1F6F9"/>
-              </a:solidFill>
-              <a:latin typeface="Clear Sans"/>
-              <a:ea typeface="Clear Sans"/>
-              <a:cs typeface="Clear Sans"/>
-              <a:sym typeface="Clear Sans"/>
-            </a:endParaRPr>
-          </a:p>
-        </p:txBody>
-      </p:sp>
-      <p:sp>
-        <p:nvSpPr>
-          <p:cNvPr id="8" name="TextBox 8"/>
-          <p:cNvSpPr txBox="1"/>
-          <p:nvPr/>
-        </p:nvSpPr>
-        <p:spPr>
-          <a:xfrm>
-            <a:off x="1208542" y="4762482"/>
-            <a:ext cx="10877016" cy="450850"/>
-          </a:xfrm>
-          <a:prstGeom prst="rect">
-            <a:avLst/>
-          </a:prstGeom>
-        </p:spPr>
-        <p:txBody>
-          <a:bodyPr lIns="0" tIns="0" rIns="0" bIns="0" rtlCol="0" anchor="t">
-            <a:spAutoFit/>
-          </a:bodyPr>
-          <a:lstStyle/>
-          <a:p>
-            <a:pPr algn="r">
-              <a:lnSpc>
-                <a:spcPts val="3199"/>
-              </a:lnSpc>
-            </a:pPr>
-            <a:r>
-              <a:rPr lang="en-US" sz="3999">
+            <a:r>
+              <a:rPr lang="en-US" sz="3999" dirty="0">
                 <a:solidFill>
                   <a:srgbClr val="F1F6F9"/>
                 </a:solidFill>
@@ -3401,39 +3369,10 @@
                 <a:cs typeface="Clear Sans"/>
                 <a:sym typeface="Clear Sans"/>
               </a:rPr>
-              <a:t>LÊ HOÀNG HIỆP-2374802010139</a:t>
-            </a:r>
-          </a:p>
-        </p:txBody>
-      </p:sp>
-      <p:sp>
-        <p:nvSpPr>
-          <p:cNvPr id="9" name="TextBox 9"/>
-          <p:cNvSpPr txBox="1"/>
-          <p:nvPr/>
-        </p:nvSpPr>
-        <p:spPr>
-          <a:xfrm>
-            <a:off x="3550624" y="5589236"/>
-            <a:ext cx="10906906" cy="850900"/>
-          </a:xfrm>
-          <a:prstGeom prst="rect">
-            <a:avLst/>
-          </a:prstGeom>
-        </p:spPr>
-        <p:txBody>
-          <a:bodyPr lIns="0" tIns="0" rIns="0" bIns="0" rtlCol="0" anchor="t">
-            <a:spAutoFit/>
-          </a:bodyPr>
-          <a:lstStyle/>
-          <a:p>
-            <a:pPr algn="r">
-              <a:lnSpc>
-                <a:spcPts val="3199"/>
-              </a:lnSpc>
-            </a:pPr>
-            <a:r>
-              <a:rPr lang="en-US" sz="3999">
+              <a:t>LÊ HOÀNG </a:t>
+            </a:r>
+            <a:r>
+              <a:rPr lang="en-US" sz="3999" dirty="0" err="1">
                 <a:solidFill>
                   <a:srgbClr val="F1F6F9"/>
                 </a:solidFill>
@@ -3442,55 +3381,10 @@
                 <a:cs typeface="Clear Sans"/>
                 <a:sym typeface="Clear Sans"/>
               </a:rPr>
-              <a:t> NGUYỄN XUÂN CÔNG SƠN-2374802013440</a:t>
-            </a:r>
-          </a:p>
-          <a:p>
-            <a:pPr algn="r">
-              <a:lnSpc>
-                <a:spcPts val="3199"/>
-              </a:lnSpc>
-            </a:pPr>
-            <a:endParaRPr lang="en-US" sz="3999">
-              <a:solidFill>
-                <a:srgbClr val="F1F6F9"/>
-              </a:solidFill>
-              <a:latin typeface="Clear Sans"/>
-              <a:ea typeface="Clear Sans"/>
-              <a:cs typeface="Clear Sans"/>
-              <a:sym typeface="Clear Sans"/>
-            </a:endParaRPr>
-          </a:p>
-        </p:txBody>
-      </p:sp>
-      <p:sp>
-        <p:nvSpPr>
-          <p:cNvPr id="10" name="TextBox 10"/>
-          <p:cNvSpPr txBox="1"/>
-          <p:nvPr/>
-        </p:nvSpPr>
-        <p:spPr>
-          <a:xfrm>
-            <a:off x="1056142" y="6365857"/>
-            <a:ext cx="12881360" cy="850900"/>
-          </a:xfrm>
-          <a:prstGeom prst="rect">
-            <a:avLst/>
-          </a:prstGeom>
-        </p:spPr>
-        <p:txBody>
-          <a:bodyPr lIns="0" tIns="0" rIns="0" bIns="0" rtlCol="0" anchor="t">
-            <a:spAutoFit/>
-          </a:bodyPr>
-          <a:lstStyle/>
-          <a:p>
-            <a:pPr algn="r">
-              <a:lnSpc>
-                <a:spcPts val="3199"/>
-              </a:lnSpc>
-            </a:pPr>
-            <a:r>
-              <a:rPr lang="en-US" sz="3999">
+              <a:t>HIỆP</a:t>
+            </a:r>
+            <a:r>
+              <a:rPr lang="en-US" sz="3999" dirty="0">
                 <a:solidFill>
                   <a:srgbClr val="F1F6F9"/>
                 </a:solidFill>
@@ -3499,16 +3393,63 @@
                 <a:cs typeface="Clear Sans"/>
                 <a:sym typeface="Clear Sans"/>
               </a:rPr>
-              <a:t>NGUYỄN PHƯỚC THÀNH-2374802013578</a:t>
-            </a:r>
-          </a:p>
-          <a:p>
-            <a:pPr algn="r">
+              <a:t> – 2374802010139</a:t>
+            </a:r>
+          </a:p>
+          <a:p>
+            <a:pPr>
               <a:lnSpc>
                 <a:spcPts val="3199"/>
               </a:lnSpc>
+              <a:spcBef>
+                <a:spcPts val="3000"/>
+              </a:spcBef>
             </a:pPr>
-            <a:endParaRPr lang="en-US" sz="3999">
+            <a:r>
+              <a:rPr lang="en-US" sz="3999" dirty="0">
+                <a:solidFill>
+                  <a:srgbClr val="F1F6F9"/>
+                </a:solidFill>
+                <a:latin typeface="Clear Sans"/>
+                <a:ea typeface="Clear Sans"/>
+                <a:cs typeface="Clear Sans"/>
+                <a:sym typeface="Clear Sans"/>
+              </a:rPr>
+              <a:t>NGUYỄN XUÂN CÔNG SƠN – 2374802013440</a:t>
+            </a:r>
+          </a:p>
+          <a:p>
+            <a:pPr>
+              <a:lnSpc>
+                <a:spcPts val="3199"/>
+              </a:lnSpc>
+              <a:spcBef>
+                <a:spcPts val="3000"/>
+              </a:spcBef>
+            </a:pPr>
+            <a:r>
+              <a:rPr lang="en-US" sz="3999" dirty="0">
+                <a:solidFill>
+                  <a:srgbClr val="F1F6F9"/>
+                </a:solidFill>
+                <a:latin typeface="Clear Sans"/>
+                <a:ea typeface="Clear Sans"/>
+                <a:cs typeface="Clear Sans"/>
+                <a:sym typeface="Clear Sans"/>
+              </a:rPr>
+              <a:t>NGUYỄN PHƯỚC THÀNH - 2374802013578</a:t>
+            </a:r>
+          </a:p>
+          <a:p>
+            <a:pPr>
+              <a:lnSpc>
+                <a:spcPts val="3199"/>
+              </a:lnSpc>
+              <a:spcBef>
+                <a:spcPts val="3000"/>
+              </a:spcBef>
+            </a:pPr>
+            <a:endParaRPr lang="en-US" sz="3999" dirty="0">
               <a:solidFill>
                 <a:srgbClr val="F1F6F9"/>
               </a:solidFill>
@@ -3588,7 +3529,7 @@
               </a:lnSpc>
             </a:pPr>
             <a:r>
-              <a:rPr lang="en-US" sz="4413" b="1">
+              <a:rPr lang="en-US" sz="4413" b="1" dirty="0" err="1">
                 <a:solidFill>
                   <a:srgbClr val="F1F6F9"/>
                 </a:solidFill>
@@ -3597,7 +3538,331 @@
                 <a:cs typeface="Clear Sans Bold"/>
                 <a:sym typeface="Clear Sans Bold"/>
               </a:rPr>
-              <a:t>TÊN ĐỀ TÀI: PHÁT HIỆN VÀ ĐẾM SỐ LƯỢNG ĐỐI TƯỢNG TRONG ẢNH (NGƯỜI, XE, VẬT THỂ)</a:t>
+              <a:t>TÊN</a:t>
+            </a:r>
+            <a:r>
+              <a:rPr lang="en-US" sz="4413" b="1" dirty="0">
+                <a:solidFill>
+                  <a:srgbClr val="F1F6F9"/>
+                </a:solidFill>
+                <a:latin typeface="Clear Sans Bold"/>
+                <a:ea typeface="Clear Sans Bold"/>
+                <a:cs typeface="Clear Sans Bold"/>
+                <a:sym typeface="Clear Sans Bold"/>
+              </a:rPr>
+              <a:t> </a:t>
+            </a:r>
+            <a:r>
+              <a:rPr lang="en-US" sz="4413" b="1" dirty="0" err="1">
+                <a:solidFill>
+                  <a:srgbClr val="F1F6F9"/>
+                </a:solidFill>
+                <a:latin typeface="Clear Sans Bold"/>
+                <a:ea typeface="Clear Sans Bold"/>
+                <a:cs typeface="Clear Sans Bold"/>
+                <a:sym typeface="Clear Sans Bold"/>
+              </a:rPr>
+              <a:t>ĐỀ</a:t>
+            </a:r>
+            <a:r>
+              <a:rPr lang="en-US" sz="4413" b="1" dirty="0">
+                <a:solidFill>
+                  <a:srgbClr val="F1F6F9"/>
+                </a:solidFill>
+                <a:latin typeface="Clear Sans Bold"/>
+                <a:ea typeface="Clear Sans Bold"/>
+                <a:cs typeface="Clear Sans Bold"/>
+                <a:sym typeface="Clear Sans Bold"/>
+              </a:rPr>
+              <a:t> TÀI: </a:t>
+            </a:r>
+            <a:r>
+              <a:rPr lang="en-US" sz="4413" b="1" dirty="0" err="1">
+                <a:solidFill>
+                  <a:srgbClr val="F1F6F9"/>
+                </a:solidFill>
+                <a:latin typeface="Clear Sans Bold"/>
+                <a:ea typeface="Clear Sans Bold"/>
+                <a:cs typeface="Clear Sans Bold"/>
+                <a:sym typeface="Clear Sans Bold"/>
+              </a:rPr>
+              <a:t>PHÁT</a:t>
+            </a:r>
+            <a:r>
+              <a:rPr lang="en-US" sz="4413" b="1" dirty="0">
+                <a:solidFill>
+                  <a:srgbClr val="F1F6F9"/>
+                </a:solidFill>
+                <a:latin typeface="Clear Sans Bold"/>
+                <a:ea typeface="Clear Sans Bold"/>
+                <a:cs typeface="Clear Sans Bold"/>
+                <a:sym typeface="Clear Sans Bold"/>
+              </a:rPr>
+              <a:t> </a:t>
+            </a:r>
+            <a:r>
+              <a:rPr lang="en-US" sz="4413" b="1" dirty="0" err="1">
+                <a:solidFill>
+                  <a:srgbClr val="F1F6F9"/>
+                </a:solidFill>
+                <a:latin typeface="Clear Sans Bold"/>
+                <a:ea typeface="Clear Sans Bold"/>
+                <a:cs typeface="Clear Sans Bold"/>
+                <a:sym typeface="Clear Sans Bold"/>
+              </a:rPr>
+              <a:t>HIỆN</a:t>
+            </a:r>
+            <a:r>
+              <a:rPr lang="en-US" sz="4413" b="1" dirty="0">
+                <a:solidFill>
+                  <a:srgbClr val="F1F6F9"/>
+                </a:solidFill>
+                <a:latin typeface="Clear Sans Bold"/>
+                <a:ea typeface="Clear Sans Bold"/>
+                <a:cs typeface="Clear Sans Bold"/>
+                <a:sym typeface="Clear Sans Bold"/>
+              </a:rPr>
+              <a:t> </a:t>
+            </a:r>
+            <a:r>
+              <a:rPr lang="en-US" sz="4413" b="1" dirty="0" err="1">
+                <a:solidFill>
+                  <a:srgbClr val="F1F6F9"/>
+                </a:solidFill>
+                <a:latin typeface="Clear Sans Bold"/>
+                <a:ea typeface="Clear Sans Bold"/>
+                <a:cs typeface="Clear Sans Bold"/>
+                <a:sym typeface="Clear Sans Bold"/>
+              </a:rPr>
+              <a:t>VÀ</a:t>
+            </a:r>
+            <a:r>
+              <a:rPr lang="en-US" sz="4413" b="1" dirty="0">
+                <a:solidFill>
+                  <a:srgbClr val="F1F6F9"/>
+                </a:solidFill>
+                <a:latin typeface="Clear Sans Bold"/>
+                <a:ea typeface="Clear Sans Bold"/>
+                <a:cs typeface="Clear Sans Bold"/>
+                <a:sym typeface="Clear Sans Bold"/>
+              </a:rPr>
+              <a:t> </a:t>
+            </a:r>
+            <a:r>
+              <a:rPr lang="en-US" sz="4413" b="1" dirty="0" err="1">
+                <a:solidFill>
+                  <a:srgbClr val="F1F6F9"/>
+                </a:solidFill>
+                <a:latin typeface="Clear Sans Bold"/>
+                <a:ea typeface="Clear Sans Bold"/>
+                <a:cs typeface="Clear Sans Bold"/>
+                <a:sym typeface="Clear Sans Bold"/>
+              </a:rPr>
+              <a:t>ĐẾM</a:t>
+            </a:r>
+            <a:r>
+              <a:rPr lang="en-US" sz="4413" b="1" dirty="0">
+                <a:solidFill>
+                  <a:srgbClr val="F1F6F9"/>
+                </a:solidFill>
+                <a:latin typeface="Clear Sans Bold"/>
+                <a:ea typeface="Clear Sans Bold"/>
+                <a:cs typeface="Clear Sans Bold"/>
+                <a:sym typeface="Clear Sans Bold"/>
+              </a:rPr>
+              <a:t> </a:t>
+            </a:r>
+            <a:r>
+              <a:rPr lang="en-US" sz="4413" b="1" dirty="0" err="1">
+                <a:solidFill>
+                  <a:srgbClr val="F1F6F9"/>
+                </a:solidFill>
+                <a:latin typeface="Clear Sans Bold"/>
+                <a:ea typeface="Clear Sans Bold"/>
+                <a:cs typeface="Clear Sans Bold"/>
+                <a:sym typeface="Clear Sans Bold"/>
+              </a:rPr>
+              <a:t>SỐ</a:t>
+            </a:r>
+            <a:r>
+              <a:rPr lang="en-US" sz="4413" b="1" dirty="0">
+                <a:solidFill>
+                  <a:srgbClr val="F1F6F9"/>
+                </a:solidFill>
+                <a:latin typeface="Clear Sans Bold"/>
+                <a:ea typeface="Clear Sans Bold"/>
+                <a:cs typeface="Clear Sans Bold"/>
+                <a:sym typeface="Clear Sans Bold"/>
+              </a:rPr>
+              <a:t> </a:t>
+            </a:r>
+            <a:r>
+              <a:rPr lang="en-US" sz="4413" b="1" dirty="0" err="1">
+                <a:solidFill>
+                  <a:srgbClr val="F1F6F9"/>
+                </a:solidFill>
+                <a:latin typeface="Clear Sans Bold"/>
+                <a:ea typeface="Clear Sans Bold"/>
+                <a:cs typeface="Clear Sans Bold"/>
+                <a:sym typeface="Clear Sans Bold"/>
+              </a:rPr>
+              <a:t>LƯỢNG</a:t>
+            </a:r>
+            <a:r>
+              <a:rPr lang="en-US" sz="4413" b="1" dirty="0">
+                <a:solidFill>
+                  <a:srgbClr val="F1F6F9"/>
+                </a:solidFill>
+                <a:latin typeface="Clear Sans Bold"/>
+                <a:ea typeface="Clear Sans Bold"/>
+                <a:cs typeface="Clear Sans Bold"/>
+                <a:sym typeface="Clear Sans Bold"/>
+              </a:rPr>
+              <a:t> </a:t>
+            </a:r>
+            <a:r>
+              <a:rPr lang="en-US" sz="4413" b="1" dirty="0" err="1">
+                <a:solidFill>
+                  <a:srgbClr val="F1F6F9"/>
+                </a:solidFill>
+                <a:latin typeface="Clear Sans Bold"/>
+                <a:ea typeface="Clear Sans Bold"/>
+                <a:cs typeface="Clear Sans Bold"/>
+                <a:sym typeface="Clear Sans Bold"/>
+              </a:rPr>
+              <a:t>ĐỐI</a:t>
+            </a:r>
+            <a:r>
+              <a:rPr lang="en-US" sz="4413" b="1" dirty="0">
+                <a:solidFill>
+                  <a:srgbClr val="F1F6F9"/>
+                </a:solidFill>
+                <a:latin typeface="Clear Sans Bold"/>
+                <a:ea typeface="Clear Sans Bold"/>
+                <a:cs typeface="Clear Sans Bold"/>
+                <a:sym typeface="Clear Sans Bold"/>
+              </a:rPr>
+              <a:t> </a:t>
+            </a:r>
+            <a:r>
+              <a:rPr lang="en-US" sz="4413" b="1" dirty="0" err="1">
+                <a:solidFill>
+                  <a:srgbClr val="F1F6F9"/>
+                </a:solidFill>
+                <a:latin typeface="Clear Sans Bold"/>
+                <a:ea typeface="Clear Sans Bold"/>
+                <a:cs typeface="Clear Sans Bold"/>
+                <a:sym typeface="Clear Sans Bold"/>
+              </a:rPr>
+              <a:t>TƯỢNG</a:t>
+            </a:r>
+            <a:r>
+              <a:rPr lang="en-US" sz="4413" b="1" dirty="0">
+                <a:solidFill>
+                  <a:srgbClr val="F1F6F9"/>
+                </a:solidFill>
+                <a:latin typeface="Clear Sans Bold"/>
+                <a:ea typeface="Clear Sans Bold"/>
+                <a:cs typeface="Clear Sans Bold"/>
+                <a:sym typeface="Clear Sans Bold"/>
+              </a:rPr>
+              <a:t> TRONG </a:t>
+            </a:r>
+            <a:r>
+              <a:rPr lang="en-US" sz="4413" b="1" dirty="0" err="1">
+                <a:solidFill>
+                  <a:srgbClr val="F1F6F9"/>
+                </a:solidFill>
+                <a:latin typeface="Clear Sans Bold"/>
+                <a:ea typeface="Clear Sans Bold"/>
+                <a:cs typeface="Clear Sans Bold"/>
+                <a:sym typeface="Clear Sans Bold"/>
+              </a:rPr>
+              <a:t>ẢNH</a:t>
+            </a:r>
+            <a:r>
+              <a:rPr lang="en-US" sz="4413" b="1" dirty="0">
+                <a:solidFill>
+                  <a:srgbClr val="F1F6F9"/>
+                </a:solidFill>
+                <a:latin typeface="Clear Sans Bold"/>
+                <a:ea typeface="Clear Sans Bold"/>
+                <a:cs typeface="Clear Sans Bold"/>
+                <a:sym typeface="Clear Sans Bold"/>
+              </a:rPr>
+              <a:t> (</a:t>
+            </a:r>
+            <a:r>
+              <a:rPr lang="en-US" sz="4413" b="1" dirty="0" err="1">
+                <a:solidFill>
+                  <a:srgbClr val="F1F6F9"/>
+                </a:solidFill>
+                <a:latin typeface="Clear Sans Bold"/>
+                <a:ea typeface="Clear Sans Bold"/>
+                <a:cs typeface="Clear Sans Bold"/>
+                <a:sym typeface="Clear Sans Bold"/>
+              </a:rPr>
+              <a:t>NGƯỜI</a:t>
+            </a:r>
+            <a:r>
+              <a:rPr lang="en-US" sz="4413" b="1" dirty="0">
+                <a:solidFill>
+                  <a:srgbClr val="F1F6F9"/>
+                </a:solidFill>
+                <a:latin typeface="Clear Sans Bold"/>
+                <a:ea typeface="Clear Sans Bold"/>
+                <a:cs typeface="Clear Sans Bold"/>
+                <a:sym typeface="Clear Sans Bold"/>
+              </a:rPr>
+              <a:t>, XE, </a:t>
+            </a:r>
+            <a:r>
+              <a:rPr lang="en-US" sz="4413" b="1" dirty="0" err="1">
+                <a:solidFill>
+                  <a:srgbClr val="F1F6F9"/>
+                </a:solidFill>
+                <a:latin typeface="Clear Sans Bold"/>
+                <a:ea typeface="Clear Sans Bold"/>
+                <a:cs typeface="Clear Sans Bold"/>
+                <a:sym typeface="Clear Sans Bold"/>
+              </a:rPr>
+              <a:t>VẬT</a:t>
+            </a:r>
+            <a:r>
+              <a:rPr lang="en-US" sz="4413" b="1" dirty="0">
+                <a:solidFill>
+                  <a:srgbClr val="F1F6F9"/>
+                </a:solidFill>
+                <a:latin typeface="Clear Sans Bold"/>
+                <a:ea typeface="Clear Sans Bold"/>
+                <a:cs typeface="Clear Sans Bold"/>
+                <a:sym typeface="Clear Sans Bold"/>
+              </a:rPr>
+              <a:t> </a:t>
+            </a:r>
+            <a:r>
+              <a:rPr lang="en-US" sz="4413" b="1" dirty="0" err="1">
+                <a:solidFill>
+                  <a:srgbClr val="F1F6F9"/>
+                </a:solidFill>
+                <a:latin typeface="Clear Sans Bold"/>
+                <a:ea typeface="Clear Sans Bold"/>
+                <a:cs typeface="Clear Sans Bold"/>
+                <a:sym typeface="Clear Sans Bold"/>
+              </a:rPr>
+              <a:t>THỂ</a:t>
+            </a:r>
+            <a:r>
+              <a:rPr lang="en-US" sz="4413" b="1" dirty="0">
+                <a:solidFill>
+                  <a:srgbClr val="F1F6F9"/>
+                </a:solidFill>
+                <a:latin typeface="Clear Sans Bold"/>
+                <a:ea typeface="Clear Sans Bold"/>
+                <a:cs typeface="Clear Sans Bold"/>
+                <a:sym typeface="Clear Sans Bold"/>
+              </a:rPr>
+              <a:t>)</a:t>
             </a:r>
           </a:p>
         </p:txBody>
@@ -4543,15 +4808,15 @@
         </p:nvSpPr>
         <p:spPr>
           <a:xfrm>
-            <a:off x="2526657" y="3424555"/>
-            <a:ext cx="8341116" cy="1247140"/>
+            <a:off x="2543863" y="3932626"/>
+            <a:ext cx="12196761" cy="563809"/>
           </a:xfrm>
           <a:prstGeom prst="rect">
             <a:avLst/>
           </a:prstGeom>
         </p:spPr>
         <p:txBody>
-          <a:bodyPr lIns="0" tIns="0" rIns="0" bIns="0" rtlCol="0" anchor="t">
+          <a:bodyPr wrap="square" lIns="0" tIns="0" rIns="0" bIns="0" rtlCol="0" anchor="t">
             <a:spAutoFit/>
           </a:bodyPr>
           <a:lstStyle/>
@@ -4564,7 +4829,7 @@
               <a:buChar char="•"/>
             </a:pPr>
             <a:r>
-              <a:rPr lang="en-US" sz="3399">
+              <a:rPr lang="en-US" sz="3399" dirty="0">
                 <a:solidFill>
                   <a:srgbClr val="14274E"/>
                 </a:solidFill>
@@ -4573,7 +4838,55 @@
                 <a:cs typeface="Times New Roman"/>
                 <a:sym typeface="Times New Roman"/>
               </a:rPr>
-              <a:t>Python 3.10, OpenCV, Numpy, Yolov8s,  roboflow, Visual Studio Code.</a:t>
+              <a:t>Python 3.11.5, OpenCV, </a:t>
+            </a:r>
+            <a:r>
+              <a:rPr lang="en-US" sz="3399" dirty="0" err="1">
+                <a:solidFill>
+                  <a:srgbClr val="14274E"/>
+                </a:solidFill>
+                <a:latin typeface="Times New Roman"/>
+                <a:ea typeface="Times New Roman"/>
+                <a:cs typeface="Times New Roman"/>
+                <a:sym typeface="Times New Roman"/>
+              </a:rPr>
+              <a:t>Numpy</a:t>
+            </a:r>
+            <a:r>
+              <a:rPr lang="en-US" sz="3399" dirty="0">
+                <a:solidFill>
+                  <a:srgbClr val="14274E"/>
+                </a:solidFill>
+                <a:latin typeface="Times New Roman"/>
+                <a:ea typeface="Times New Roman"/>
+                <a:cs typeface="Times New Roman"/>
+                <a:sym typeface="Times New Roman"/>
+              </a:rPr>
+              <a:t>, </a:t>
+            </a:r>
+            <a:r>
+              <a:rPr lang="en-US" sz="3399" dirty="0" err="1">
+                <a:solidFill>
+                  <a:srgbClr val="14274E"/>
+                </a:solidFill>
+                <a:latin typeface="Times New Roman"/>
+                <a:ea typeface="Times New Roman"/>
+                <a:cs typeface="Times New Roman"/>
+                <a:sym typeface="Times New Roman"/>
+              </a:rPr>
+              <a:t>Yolov8s</a:t>
+            </a:r>
+            <a:r>
+              <a:rPr lang="en-US" sz="3399" dirty="0">
+                <a:solidFill>
+                  <a:srgbClr val="14274E"/>
+                </a:solidFill>
+                <a:latin typeface="Times New Roman"/>
+                <a:ea typeface="Times New Roman"/>
+                <a:cs typeface="Times New Roman"/>
+                <a:sym typeface="Times New Roman"/>
+              </a:rPr>
+              <a:t>,  Visual Studio Code.</a:t>
             </a:r>
           </a:p>
         </p:txBody>
@@ -4586,15 +4899,15 @@
         </p:nvSpPr>
         <p:spPr>
           <a:xfrm>
-            <a:off x="2526657" y="4753292"/>
-            <a:ext cx="8231467" cy="647065"/>
+            <a:off x="2543863" y="4704079"/>
+            <a:ext cx="8149739" cy="563809"/>
           </a:xfrm>
           <a:prstGeom prst="rect">
             <a:avLst/>
           </a:prstGeom>
         </p:spPr>
         <p:txBody>
-          <a:bodyPr lIns="0" tIns="0" rIns="0" bIns="0" rtlCol="0" anchor="t">
+          <a:bodyPr wrap="square" lIns="0" tIns="0" rIns="0" bIns="0" rtlCol="0" anchor="t">
             <a:spAutoFit/>
           </a:bodyPr>
           <a:lstStyle/>
@@ -4607,7 +4920,7 @@
               <a:buChar char="•"/>
             </a:pPr>
             <a:r>
-              <a:rPr lang="en-US" sz="3399">
+              <a:rPr lang="en-US" sz="3399" dirty="0" err="1">
                 <a:solidFill>
                   <a:srgbClr val="394867"/>
                 </a:solidFill>
@@ -4616,7 +4929,115 @@
                 <a:cs typeface="Times New Roman"/>
                 <a:sym typeface="Times New Roman"/>
               </a:rPr>
-              <a:t>Chạy trên Windown/Linux, hỗ trợ GPU</a:t>
+              <a:t>Chạy</a:t>
+            </a:r>
+            <a:r>
+              <a:rPr lang="en-US" sz="3399" dirty="0">
+                <a:solidFill>
+                  <a:srgbClr val="394867"/>
+                </a:solidFill>
+                <a:latin typeface="Times New Roman"/>
+                <a:ea typeface="Times New Roman"/>
+                <a:cs typeface="Times New Roman"/>
+                <a:sym typeface="Times New Roman"/>
+              </a:rPr>
+              <a:t> </a:t>
+            </a:r>
+            <a:r>
+              <a:rPr lang="en-US" sz="3399" dirty="0" err="1">
+                <a:solidFill>
+                  <a:srgbClr val="394867"/>
+                </a:solidFill>
+                <a:latin typeface="Times New Roman"/>
+                <a:ea typeface="Times New Roman"/>
+                <a:cs typeface="Times New Roman"/>
+                <a:sym typeface="Times New Roman"/>
+              </a:rPr>
+              <a:t>trên</a:t>
+            </a:r>
+            <a:r>
+              <a:rPr lang="en-US" sz="3399" dirty="0">
+                <a:solidFill>
+                  <a:srgbClr val="394867"/>
+                </a:solidFill>
+                <a:latin typeface="Times New Roman"/>
+                <a:ea typeface="Times New Roman"/>
+                <a:cs typeface="Times New Roman"/>
+                <a:sym typeface="Times New Roman"/>
+              </a:rPr>
+              <a:t> </a:t>
+            </a:r>
+            <a:r>
+              <a:rPr lang="en-US" sz="3399" dirty="0" err="1">
+                <a:solidFill>
+                  <a:srgbClr val="394867"/>
+                </a:solidFill>
+                <a:latin typeface="Times New Roman"/>
+                <a:ea typeface="Times New Roman"/>
+                <a:cs typeface="Times New Roman"/>
+                <a:sym typeface="Times New Roman"/>
+              </a:rPr>
+              <a:t>Windown</a:t>
+            </a:r>
+            <a:r>
+              <a:rPr lang="en-US" sz="3399" dirty="0">
+                <a:solidFill>
+                  <a:srgbClr val="394867"/>
+                </a:solidFill>
+                <a:latin typeface="Times New Roman"/>
+                <a:ea typeface="Times New Roman"/>
+                <a:cs typeface="Times New Roman"/>
+                <a:sym typeface="Times New Roman"/>
+              </a:rPr>
+              <a:t>/Linux, </a:t>
+            </a:r>
+            <a:r>
+              <a:rPr lang="en-US" sz="3399" dirty="0" err="1">
+                <a:solidFill>
+                  <a:srgbClr val="394867"/>
+                </a:solidFill>
+                <a:latin typeface="Times New Roman"/>
+                <a:ea typeface="Times New Roman"/>
+                <a:cs typeface="Times New Roman"/>
+                <a:sym typeface="Times New Roman"/>
+              </a:rPr>
+              <a:t>hỗ</a:t>
+            </a:r>
+            <a:r>
+              <a:rPr lang="en-US" sz="3399" dirty="0">
+                <a:solidFill>
+                  <a:srgbClr val="394867"/>
+                </a:solidFill>
+                <a:latin typeface="Times New Roman"/>
+                <a:ea typeface="Times New Roman"/>
+                <a:cs typeface="Times New Roman"/>
+                <a:sym typeface="Times New Roman"/>
+              </a:rPr>
+              <a:t> </a:t>
+            </a:r>
+            <a:r>
+              <a:rPr lang="en-US" sz="3399" dirty="0" err="1">
+                <a:solidFill>
+                  <a:srgbClr val="394867"/>
+                </a:solidFill>
+                <a:latin typeface="Times New Roman"/>
+                <a:ea typeface="Times New Roman"/>
+                <a:cs typeface="Times New Roman"/>
+                <a:sym typeface="Times New Roman"/>
+              </a:rPr>
+              <a:t>trợ</a:t>
+            </a:r>
+            <a:r>
+              <a:rPr lang="en-US" sz="3399" dirty="0">
+                <a:solidFill>
+                  <a:srgbClr val="394867"/>
+                </a:solidFill>
+                <a:latin typeface="Times New Roman"/>
+                <a:ea typeface="Times New Roman"/>
+                <a:cs typeface="Times New Roman"/>
+                <a:sym typeface="Times New Roman"/>
+              </a:rPr>
+              <a:t> GPU</a:t>
             </a:r>
           </a:p>
         </p:txBody>
@@ -4629,7 +5050,7 @@
         </p:nvSpPr>
         <p:spPr>
           <a:xfrm>
-            <a:off x="2526657" y="5525135"/>
+            <a:off x="2617075" y="5387339"/>
             <a:ext cx="6417276" cy="647065"/>
           </a:xfrm>
           <a:prstGeom prst="rect">
@@ -4650,7 +5071,7 @@
               <a:buChar char="•"/>
             </a:pPr>
             <a:r>
-              <a:rPr lang="en-US" sz="3399">
+              <a:rPr lang="en-US" sz="3399" dirty="0">
                 <a:solidFill>
                   <a:srgbClr val="394867"/>
                 </a:solidFill>
@@ -4659,8 +5080,77 @@
                 <a:cs typeface="Times New Roman"/>
                 <a:sym typeface="Times New Roman"/>
               </a:rPr>
-              <a:t>Cài đặt Ulltralytics, ByteTrack</a:t>
-            </a:r>
+              <a:t>Cài </a:t>
+            </a:r>
+            <a:r>
+              <a:rPr lang="en-US" sz="3399" dirty="0" err="1">
+                <a:solidFill>
+                  <a:srgbClr val="394867"/>
+                </a:solidFill>
+                <a:latin typeface="Times New Roman"/>
+                <a:ea typeface="Times New Roman"/>
+                <a:cs typeface="Times New Roman"/>
+                <a:sym typeface="Times New Roman"/>
+              </a:rPr>
+              <a:t>đặt</a:t>
+            </a:r>
+            <a:r>
+              <a:rPr lang="en-US" sz="3399" dirty="0">
+                <a:solidFill>
+                  <a:srgbClr val="394867"/>
+                </a:solidFill>
+                <a:latin typeface="Times New Roman"/>
+                <a:ea typeface="Times New Roman"/>
+                <a:cs typeface="Times New Roman"/>
+                <a:sym typeface="Times New Roman"/>
+              </a:rPr>
+              <a:t> </a:t>
+            </a:r>
+            <a:r>
+              <a:rPr lang="en-US" sz="3399" dirty="0" err="1">
+                <a:solidFill>
+                  <a:srgbClr val="394867"/>
+                </a:solidFill>
+                <a:latin typeface="Times New Roman"/>
+                <a:ea typeface="Times New Roman"/>
+                <a:cs typeface="Times New Roman"/>
+                <a:sym typeface="Times New Roman"/>
+              </a:rPr>
+              <a:t>Ulltralytics</a:t>
+            </a:r>
+            <a:r>
+              <a:rPr lang="en-US" sz="3399" dirty="0">
+                <a:solidFill>
+                  <a:srgbClr val="394867"/>
+                </a:solidFill>
+                <a:latin typeface="Times New Roman"/>
+                <a:ea typeface="Times New Roman"/>
+                <a:cs typeface="Times New Roman"/>
+                <a:sym typeface="Times New Roman"/>
+              </a:rPr>
+              <a:t>, </a:t>
+            </a:r>
+            <a:r>
+              <a:rPr lang="en-US" sz="3399" dirty="0" err="1">
+                <a:solidFill>
+                  <a:srgbClr val="394867"/>
+                </a:solidFill>
+                <a:latin typeface="Times New Roman"/>
+                <a:ea typeface="Times New Roman"/>
+                <a:cs typeface="Times New Roman"/>
+                <a:sym typeface="Times New Roman"/>
+              </a:rPr>
+              <a:t>ByteTrack</a:t>
+            </a:r>
+            <a:endParaRPr lang="en-US" sz="3399" dirty="0">
+              <a:solidFill>
+                <a:srgbClr val="394867"/>
+              </a:solidFill>
+              <a:latin typeface="Times New Roman"/>
+              <a:ea typeface="Times New Roman"/>
+              <a:cs typeface="Times New Roman"/>
+              <a:sym typeface="Times New Roman"/>
+            </a:endParaRPr>
           </a:p>
         </p:txBody>
       </p:sp>
@@ -5113,7 +5603,7 @@
         <p:spPr>
           <a:xfrm>
             <a:off x="2424035" y="3346320"/>
-            <a:ext cx="12427823" cy="4578350"/>
+            <a:ext cx="12427823" cy="4640758"/>
           </a:xfrm>
           <a:prstGeom prst="rect">
             <a:avLst/>
@@ -5133,16 +5623,88 @@
               <a:buChar char="•"/>
             </a:pPr>
             <a:r>
-              <a:rPr lang="en-US" sz="2000" b="1">
-                <a:solidFill>
-                  <a:srgbClr val="14274E"/>
-                </a:solidFill>
-                <a:latin typeface="Clear Sans Bold"/>
-                <a:ea typeface="Clear Sans Bold"/>
-                <a:cs typeface="Clear Sans Bold"/>
-                <a:sym typeface="Clear Sans Bold"/>
-              </a:rPr>
-              <a:t>Input: Video thực tế videomo2.mp4.</a:t>
+              <a:rPr lang="en-US" sz="2000" b="1" dirty="0">
+                <a:solidFill>
+                  <a:srgbClr val="14274E"/>
+                </a:solidFill>
+                <a:latin typeface="Clear Sans Bold"/>
+                <a:ea typeface="Clear Sans Bold"/>
+                <a:cs typeface="Clear Sans Bold"/>
+                <a:sym typeface="Clear Sans Bold"/>
+              </a:rPr>
+              <a:t>Input: Video </a:t>
+            </a:r>
+            <a:r>
+              <a:rPr lang="en-US" sz="2000" b="1" dirty="0" err="1">
+                <a:solidFill>
+                  <a:srgbClr val="14274E"/>
+                </a:solidFill>
+                <a:latin typeface="Clear Sans Bold"/>
+                <a:ea typeface="Clear Sans Bold"/>
+                <a:cs typeface="Clear Sans Bold"/>
+                <a:sym typeface="Clear Sans Bold"/>
+              </a:rPr>
+              <a:t>thực</a:t>
+            </a:r>
+            <a:r>
+              <a:rPr lang="en-US" sz="2000" b="1" dirty="0">
+                <a:solidFill>
+                  <a:srgbClr val="14274E"/>
+                </a:solidFill>
+                <a:latin typeface="Clear Sans Bold"/>
+                <a:ea typeface="Clear Sans Bold"/>
+                <a:cs typeface="Clear Sans Bold"/>
+                <a:sym typeface="Clear Sans Bold"/>
+              </a:rPr>
+              <a:t> </a:t>
+            </a:r>
+            <a:r>
+              <a:rPr lang="en-US" sz="2000" b="1" dirty="0" err="1">
+                <a:solidFill>
+                  <a:srgbClr val="14274E"/>
+                </a:solidFill>
+                <a:latin typeface="Clear Sans Bold"/>
+                <a:ea typeface="Clear Sans Bold"/>
+                <a:cs typeface="Clear Sans Bold"/>
+                <a:sym typeface="Clear Sans Bold"/>
+              </a:rPr>
+              <a:t>tế</a:t>
+            </a:r>
+            <a:r>
+              <a:rPr lang="en-US" sz="2000" b="1" dirty="0">
+                <a:solidFill>
+                  <a:srgbClr val="14274E"/>
+                </a:solidFill>
+                <a:latin typeface="Clear Sans Bold"/>
+                <a:ea typeface="Clear Sans Bold"/>
+                <a:cs typeface="Clear Sans Bold"/>
+                <a:sym typeface="Clear Sans Bold"/>
+              </a:rPr>
+              <a:t> </a:t>
+            </a:r>
+            <a:r>
+              <a:rPr lang="en-US" sz="2000" b="1" dirty="0" err="1">
+                <a:solidFill>
+                  <a:srgbClr val="14274E"/>
+                </a:solidFill>
+                <a:latin typeface="Clear Sans Bold"/>
+                <a:ea typeface="Clear Sans Bold"/>
+                <a:cs typeface="Clear Sans Bold"/>
+                <a:sym typeface="Clear Sans Bold"/>
+              </a:rPr>
+              <a:t>videomo2.mp4</a:t>
+            </a:r>
+            <a:r>
+              <a:rPr lang="en-US" sz="2000" b="1" dirty="0">
+                <a:solidFill>
+                  <a:srgbClr val="14274E"/>
+                </a:solidFill>
+                <a:latin typeface="Clear Sans Bold"/>
+                <a:ea typeface="Clear Sans Bold"/>
+                <a:cs typeface="Clear Sans Bold"/>
+                <a:sym typeface="Clear Sans Bold"/>
+              </a:rPr>
+              <a:t>.</a:t>
             </a:r>
           </a:p>
           <a:p>
@@ -5154,16 +5716,88 @@
               <a:buChar char="•"/>
             </a:pPr>
             <a:r>
-              <a:rPr lang="en-US" sz="2000" b="1">
-                <a:solidFill>
-                  <a:srgbClr val="14274E"/>
-                </a:solidFill>
-                <a:latin typeface="Clear Sans Bold"/>
-                <a:ea typeface="Clear Sans Bold"/>
-                <a:cs typeface="Clear Sans Bold"/>
-                <a:sym typeface="Clear Sans Bold"/>
-              </a:rPr>
-              <a:t>Quy trình hệ thống:</a:t>
+              <a:rPr lang="en-US" sz="2000" b="1" dirty="0">
+                <a:solidFill>
+                  <a:srgbClr val="14274E"/>
+                </a:solidFill>
+                <a:latin typeface="Clear Sans Bold"/>
+                <a:ea typeface="Clear Sans Bold"/>
+                <a:cs typeface="Clear Sans Bold"/>
+                <a:sym typeface="Clear Sans Bold"/>
+              </a:rPr>
+              <a:t>Quy </a:t>
+            </a:r>
+            <a:r>
+              <a:rPr lang="en-US" sz="2000" b="1" dirty="0" err="1">
+                <a:solidFill>
+                  <a:srgbClr val="14274E"/>
+                </a:solidFill>
+                <a:latin typeface="Clear Sans Bold"/>
+                <a:ea typeface="Clear Sans Bold"/>
+                <a:cs typeface="Clear Sans Bold"/>
+                <a:sym typeface="Clear Sans Bold"/>
+              </a:rPr>
+              <a:t>trình</a:t>
+            </a:r>
+            <a:r>
+              <a:rPr lang="en-US" sz="2000" b="1" dirty="0">
+                <a:solidFill>
+                  <a:srgbClr val="14274E"/>
+                </a:solidFill>
+                <a:latin typeface="Clear Sans Bold"/>
+                <a:ea typeface="Clear Sans Bold"/>
+                <a:cs typeface="Clear Sans Bold"/>
+                <a:sym typeface="Clear Sans Bold"/>
+              </a:rPr>
+              <a:t> </a:t>
+            </a:r>
+            <a:r>
+              <a:rPr lang="en-US" sz="2000" b="1" dirty="0" err="1">
+                <a:solidFill>
+                  <a:srgbClr val="14274E"/>
+                </a:solidFill>
+                <a:latin typeface="Clear Sans Bold"/>
+                <a:ea typeface="Clear Sans Bold"/>
+                <a:cs typeface="Clear Sans Bold"/>
+                <a:sym typeface="Clear Sans Bold"/>
+              </a:rPr>
+              <a:t>hệ</a:t>
+            </a:r>
+            <a:r>
+              <a:rPr lang="en-US" sz="2000" b="1" dirty="0">
+                <a:solidFill>
+                  <a:srgbClr val="14274E"/>
+                </a:solidFill>
+                <a:latin typeface="Clear Sans Bold"/>
+                <a:ea typeface="Clear Sans Bold"/>
+                <a:cs typeface="Clear Sans Bold"/>
+                <a:sym typeface="Clear Sans Bold"/>
+              </a:rPr>
+              <a:t> </a:t>
+            </a:r>
+            <a:r>
+              <a:rPr lang="en-US" sz="2000" b="1" dirty="0" err="1">
+                <a:solidFill>
+                  <a:srgbClr val="14274E"/>
+                </a:solidFill>
+                <a:latin typeface="Clear Sans Bold"/>
+                <a:ea typeface="Clear Sans Bold"/>
+                <a:cs typeface="Clear Sans Bold"/>
+                <a:sym typeface="Clear Sans Bold"/>
+              </a:rPr>
+              <a:t>thống</a:t>
+            </a:r>
+            <a:r>
+              <a:rPr lang="en-US" sz="2000" b="1" dirty="0">
+                <a:solidFill>
+                  <a:srgbClr val="14274E"/>
+                </a:solidFill>
+                <a:latin typeface="Clear Sans Bold"/>
+                <a:ea typeface="Clear Sans Bold"/>
+                <a:cs typeface="Clear Sans Bold"/>
+                <a:sym typeface="Clear Sans Bold"/>
+              </a:rPr>
+              <a:t>:</a:t>
             </a:r>
           </a:p>
           <a:p>
@@ -5174,16 +5808,100 @@
               <a:buAutoNum type="arabicPeriod"/>
             </a:pPr>
             <a:r>
-              <a:rPr lang="en-US" sz="2000" b="1">
-                <a:solidFill>
-                  <a:srgbClr val="14274E"/>
-                </a:solidFill>
-                <a:latin typeface="Clear Sans Bold"/>
-                <a:ea typeface="Clear Sans Bold"/>
-                <a:cs typeface="Clear Sans Bold"/>
-                <a:sym typeface="Clear Sans Bold"/>
-              </a:rPr>
-              <a:t>Phát hiện phương tiện:</a:t>
+              <a:rPr lang="en-US" sz="2000" b="1" dirty="0" err="1">
+                <a:solidFill>
+                  <a:srgbClr val="14274E"/>
+                </a:solidFill>
+                <a:latin typeface="Clear Sans Bold"/>
+                <a:ea typeface="Clear Sans Bold"/>
+                <a:cs typeface="Clear Sans Bold"/>
+                <a:sym typeface="Clear Sans Bold"/>
+              </a:rPr>
+              <a:t>Phát</a:t>
+            </a:r>
+            <a:r>
+              <a:rPr lang="en-US" sz="2000" b="1" dirty="0">
+                <a:solidFill>
+                  <a:srgbClr val="14274E"/>
+                </a:solidFill>
+                <a:latin typeface="Clear Sans Bold"/>
+                <a:ea typeface="Clear Sans Bold"/>
+                <a:cs typeface="Clear Sans Bold"/>
+                <a:sym typeface="Clear Sans Bold"/>
+              </a:rPr>
+              <a:t> </a:t>
+            </a:r>
+            <a:r>
+              <a:rPr lang="en-US" sz="2000" b="1" dirty="0" err="1">
+                <a:solidFill>
+                  <a:srgbClr val="14274E"/>
+                </a:solidFill>
+                <a:latin typeface="Clear Sans Bold"/>
+                <a:ea typeface="Clear Sans Bold"/>
+                <a:cs typeface="Clear Sans Bold"/>
+                <a:sym typeface="Clear Sans Bold"/>
+              </a:rPr>
+              <a:t>hiện</a:t>
+            </a:r>
+            <a:r>
+              <a:rPr lang="en-US" sz="2000" b="1" dirty="0">
+                <a:solidFill>
+                  <a:srgbClr val="14274E"/>
+                </a:solidFill>
+                <a:latin typeface="Clear Sans Bold"/>
+                <a:ea typeface="Clear Sans Bold"/>
+                <a:cs typeface="Clear Sans Bold"/>
+                <a:sym typeface="Clear Sans Bold"/>
+              </a:rPr>
+              <a:t> </a:t>
+            </a:r>
+            <a:r>
+              <a:rPr lang="en-US" sz="2000" b="1" dirty="0" err="1">
+                <a:solidFill>
+                  <a:srgbClr val="14274E"/>
+                </a:solidFill>
+                <a:latin typeface="Clear Sans Bold"/>
+                <a:ea typeface="Clear Sans Bold"/>
+                <a:cs typeface="Clear Sans Bold"/>
+                <a:sym typeface="Clear Sans Bold"/>
+              </a:rPr>
+              <a:t>phương</a:t>
+            </a:r>
+            <a:r>
+              <a:rPr lang="en-US" sz="2000" b="1" dirty="0">
+                <a:solidFill>
+                  <a:srgbClr val="14274E"/>
+                </a:solidFill>
+                <a:latin typeface="Clear Sans Bold"/>
+                <a:ea typeface="Clear Sans Bold"/>
+                <a:cs typeface="Clear Sans Bold"/>
+                <a:sym typeface="Clear Sans Bold"/>
+              </a:rPr>
+              <a:t> </a:t>
+            </a:r>
+            <a:r>
+              <a:rPr lang="en-US" sz="2000" b="1" dirty="0" err="1">
+                <a:solidFill>
+                  <a:srgbClr val="14274E"/>
+                </a:solidFill>
+                <a:latin typeface="Clear Sans Bold"/>
+                <a:ea typeface="Clear Sans Bold"/>
+                <a:cs typeface="Clear Sans Bold"/>
+                <a:sym typeface="Clear Sans Bold"/>
+              </a:rPr>
+              <a:t>tiện</a:t>
+            </a:r>
+            <a:r>
+              <a:rPr lang="en-US" sz="2000" b="1" dirty="0">
+                <a:solidFill>
+                  <a:srgbClr val="14274E"/>
+                </a:solidFill>
+                <a:latin typeface="Clear Sans Bold"/>
+                <a:ea typeface="Clear Sans Bold"/>
+                <a:cs typeface="Clear Sans Bold"/>
+                <a:sym typeface="Clear Sans Bold"/>
+              </a:rPr>
+              <a:t>:</a:t>
             </a:r>
           </a:p>
           <a:p>
@@ -5195,16 +5913,388 @@
               <a:buChar char="⚬"/>
             </a:pPr>
             <a:r>
-              <a:rPr lang="en-US" sz="2000" b="1">
-                <a:solidFill>
-                  <a:srgbClr val="14274E"/>
-                </a:solidFill>
-                <a:latin typeface="Clear Sans Bold"/>
-                <a:ea typeface="Clear Sans Bold"/>
-                <a:cs typeface="Clear Sans Bold"/>
-                <a:sym typeface="Clear Sans Bold"/>
-              </a:rPr>
-              <a:t>Sử dụng mô hình YOLOv8s.pt để phát hiện các phương tiện trong từng khung hình của video.</a:t>
+              <a:rPr lang="en-US" sz="2000" b="1" dirty="0" err="1">
+                <a:solidFill>
+                  <a:srgbClr val="14274E"/>
+                </a:solidFill>
+                <a:latin typeface="Clear Sans Bold"/>
+                <a:ea typeface="Clear Sans Bold"/>
+                <a:cs typeface="Clear Sans Bold"/>
+                <a:sym typeface="Clear Sans Bold"/>
+              </a:rPr>
+              <a:t>Sử</a:t>
+            </a:r>
+            <a:r>
+              <a:rPr lang="en-US" sz="2000" b="1" dirty="0">
+                <a:solidFill>
+                  <a:srgbClr val="14274E"/>
+                </a:solidFill>
+                <a:latin typeface="Clear Sans Bold"/>
+                <a:ea typeface="Clear Sans Bold"/>
+                <a:cs typeface="Clear Sans Bold"/>
+                <a:sym typeface="Clear Sans Bold"/>
+              </a:rPr>
+              <a:t> </a:t>
+            </a:r>
+            <a:r>
+              <a:rPr lang="en-US" sz="2000" b="1" dirty="0" err="1">
+                <a:solidFill>
+                  <a:srgbClr val="14274E"/>
+                </a:solidFill>
+                <a:latin typeface="Clear Sans Bold"/>
+                <a:ea typeface="Clear Sans Bold"/>
+                <a:cs typeface="Clear Sans Bold"/>
+                <a:sym typeface="Clear Sans Bold"/>
+              </a:rPr>
+              <a:t>dụng</a:t>
+            </a:r>
+            <a:r>
+              <a:rPr lang="en-US" sz="2000" b="1" dirty="0">
+                <a:solidFill>
+                  <a:srgbClr val="14274E"/>
+                </a:solidFill>
+                <a:latin typeface="Clear Sans Bold"/>
+                <a:ea typeface="Clear Sans Bold"/>
+                <a:cs typeface="Clear Sans Bold"/>
+                <a:sym typeface="Clear Sans Bold"/>
+              </a:rPr>
+              <a:t> </a:t>
+            </a:r>
+            <a:r>
+              <a:rPr lang="en-US" sz="2000" b="1" dirty="0" err="1">
+                <a:solidFill>
+                  <a:srgbClr val="14274E"/>
+                </a:solidFill>
+                <a:latin typeface="Clear Sans Bold"/>
+                <a:ea typeface="Clear Sans Bold"/>
+                <a:cs typeface="Clear Sans Bold"/>
+                <a:sym typeface="Clear Sans Bold"/>
+              </a:rPr>
+              <a:t>mô</a:t>
+            </a:r>
+            <a:r>
+              <a:rPr lang="en-US" sz="2000" b="1" dirty="0">
+                <a:solidFill>
+                  <a:srgbClr val="14274E"/>
+                </a:solidFill>
+                <a:latin typeface="Clear Sans Bold"/>
+                <a:ea typeface="Clear Sans Bold"/>
+                <a:cs typeface="Clear Sans Bold"/>
+                <a:sym typeface="Clear Sans Bold"/>
+              </a:rPr>
+              <a:t> </a:t>
+            </a:r>
+            <a:r>
+              <a:rPr lang="en-US" sz="2000" b="1" dirty="0" err="1">
+                <a:solidFill>
+                  <a:srgbClr val="14274E"/>
+                </a:solidFill>
+                <a:latin typeface="Clear Sans Bold"/>
+                <a:ea typeface="Clear Sans Bold"/>
+                <a:cs typeface="Clear Sans Bold"/>
+                <a:sym typeface="Clear Sans Bold"/>
+              </a:rPr>
+              <a:t>hình</a:t>
+            </a:r>
+            <a:r>
+              <a:rPr lang="en-US" sz="2000" b="1" dirty="0">
+                <a:solidFill>
+                  <a:srgbClr val="14274E"/>
+                </a:solidFill>
+                <a:latin typeface="Clear Sans Bold"/>
+                <a:ea typeface="Clear Sans Bold"/>
+                <a:cs typeface="Clear Sans Bold"/>
+                <a:sym typeface="Clear Sans Bold"/>
+              </a:rPr>
+              <a:t> </a:t>
+            </a:r>
+            <a:r>
+              <a:rPr lang="en-US" sz="2000" b="1" dirty="0" err="1">
+                <a:solidFill>
+                  <a:srgbClr val="14274E"/>
+                </a:solidFill>
+                <a:latin typeface="Clear Sans Bold"/>
+                <a:ea typeface="Clear Sans Bold"/>
+                <a:cs typeface="Clear Sans Bold"/>
+                <a:sym typeface="Clear Sans Bold"/>
+              </a:rPr>
+              <a:t>YOLOv8s.pt</a:t>
+            </a:r>
+            <a:r>
+              <a:rPr lang="en-US" sz="2000" b="1" dirty="0">
+                <a:solidFill>
+                  <a:srgbClr val="14274E"/>
+                </a:solidFill>
+                <a:latin typeface="Clear Sans Bold"/>
+                <a:ea typeface="Clear Sans Bold"/>
+                <a:cs typeface="Clear Sans Bold"/>
+                <a:sym typeface="Clear Sans Bold"/>
+              </a:rPr>
+              <a:t> </a:t>
+            </a:r>
+            <a:r>
+              <a:rPr lang="en-US" sz="2000" b="1" dirty="0" err="1">
+                <a:solidFill>
+                  <a:srgbClr val="14274E"/>
+                </a:solidFill>
+                <a:latin typeface="Clear Sans Bold"/>
+                <a:ea typeface="Clear Sans Bold"/>
+                <a:cs typeface="Clear Sans Bold"/>
+                <a:sym typeface="Clear Sans Bold"/>
+              </a:rPr>
+              <a:t>để</a:t>
+            </a:r>
+            <a:r>
+              <a:rPr lang="en-US" sz="2000" b="1" dirty="0">
+                <a:solidFill>
+                  <a:srgbClr val="14274E"/>
+                </a:solidFill>
+                <a:latin typeface="Clear Sans Bold"/>
+                <a:ea typeface="Clear Sans Bold"/>
+                <a:cs typeface="Clear Sans Bold"/>
+                <a:sym typeface="Clear Sans Bold"/>
+              </a:rPr>
+              <a:t> </a:t>
+            </a:r>
+            <a:r>
+              <a:rPr lang="en-US" sz="2000" b="1" dirty="0" err="1">
+                <a:solidFill>
+                  <a:srgbClr val="14274E"/>
+                </a:solidFill>
+                <a:latin typeface="Clear Sans Bold"/>
+                <a:ea typeface="Clear Sans Bold"/>
+                <a:cs typeface="Clear Sans Bold"/>
+                <a:sym typeface="Clear Sans Bold"/>
+              </a:rPr>
+              <a:t>phát</a:t>
+            </a:r>
+            <a:r>
+              <a:rPr lang="en-US" sz="2000" b="1" dirty="0">
+                <a:solidFill>
+                  <a:srgbClr val="14274E"/>
+                </a:solidFill>
+                <a:latin typeface="Clear Sans Bold"/>
+                <a:ea typeface="Clear Sans Bold"/>
+                <a:cs typeface="Clear Sans Bold"/>
+                <a:sym typeface="Clear Sans Bold"/>
+              </a:rPr>
+              <a:t> </a:t>
+            </a:r>
+            <a:r>
+              <a:rPr lang="en-US" sz="2000" b="1" dirty="0" err="1">
+                <a:solidFill>
+                  <a:srgbClr val="14274E"/>
+                </a:solidFill>
+                <a:latin typeface="Clear Sans Bold"/>
+                <a:ea typeface="Clear Sans Bold"/>
+                <a:cs typeface="Clear Sans Bold"/>
+                <a:sym typeface="Clear Sans Bold"/>
+              </a:rPr>
+              <a:t>hiện</a:t>
+            </a:r>
+            <a:r>
+              <a:rPr lang="en-US" sz="2000" b="1" dirty="0">
+                <a:solidFill>
+                  <a:srgbClr val="14274E"/>
+                </a:solidFill>
+                <a:latin typeface="Clear Sans Bold"/>
+                <a:ea typeface="Clear Sans Bold"/>
+                <a:cs typeface="Clear Sans Bold"/>
+                <a:sym typeface="Clear Sans Bold"/>
+              </a:rPr>
+              <a:t> </a:t>
+            </a:r>
+            <a:r>
+              <a:rPr lang="en-US" sz="2000" b="1" dirty="0" err="1">
+                <a:solidFill>
+                  <a:srgbClr val="14274E"/>
+                </a:solidFill>
+                <a:latin typeface="Clear Sans Bold"/>
+                <a:ea typeface="Clear Sans Bold"/>
+                <a:cs typeface="Clear Sans Bold"/>
+                <a:sym typeface="Clear Sans Bold"/>
+              </a:rPr>
+              <a:t>các</a:t>
+            </a:r>
+            <a:r>
+              <a:rPr lang="en-US" sz="2000" b="1" dirty="0">
+                <a:solidFill>
+                  <a:srgbClr val="14274E"/>
+                </a:solidFill>
+                <a:latin typeface="Clear Sans Bold"/>
+                <a:ea typeface="Clear Sans Bold"/>
+                <a:cs typeface="Clear Sans Bold"/>
+                <a:sym typeface="Clear Sans Bold"/>
+              </a:rPr>
+              <a:t> </a:t>
+            </a:r>
+            <a:r>
+              <a:rPr lang="en-US" sz="2000" b="1" dirty="0" err="1">
+                <a:solidFill>
+                  <a:srgbClr val="14274E"/>
+                </a:solidFill>
+                <a:latin typeface="Clear Sans Bold"/>
+                <a:ea typeface="Clear Sans Bold"/>
+                <a:cs typeface="Clear Sans Bold"/>
+                <a:sym typeface="Clear Sans Bold"/>
+              </a:rPr>
+              <a:t>phương</a:t>
+            </a:r>
+            <a:r>
+              <a:rPr lang="en-US" sz="2000" b="1" dirty="0">
+                <a:solidFill>
+                  <a:srgbClr val="14274E"/>
+                </a:solidFill>
+                <a:latin typeface="Clear Sans Bold"/>
+                <a:ea typeface="Clear Sans Bold"/>
+                <a:cs typeface="Clear Sans Bold"/>
+                <a:sym typeface="Clear Sans Bold"/>
+              </a:rPr>
+              <a:t> </a:t>
+            </a:r>
+            <a:r>
+              <a:rPr lang="en-US" sz="2000" b="1" dirty="0" err="1">
+                <a:solidFill>
+                  <a:srgbClr val="14274E"/>
+                </a:solidFill>
+                <a:latin typeface="Clear Sans Bold"/>
+                <a:ea typeface="Clear Sans Bold"/>
+                <a:cs typeface="Clear Sans Bold"/>
+                <a:sym typeface="Clear Sans Bold"/>
+              </a:rPr>
+              <a:t>tiện</a:t>
+            </a:r>
+            <a:r>
+              <a:rPr lang="en-US" sz="2000" b="1" dirty="0">
+                <a:solidFill>
+                  <a:srgbClr val="14274E"/>
+                </a:solidFill>
+                <a:latin typeface="Clear Sans Bold"/>
+                <a:ea typeface="Clear Sans Bold"/>
+                <a:cs typeface="Clear Sans Bold"/>
+                <a:sym typeface="Clear Sans Bold"/>
+              </a:rPr>
+              <a:t> </a:t>
+            </a:r>
+            <a:r>
+              <a:rPr lang="en-US" sz="2000" b="1" dirty="0" err="1">
+                <a:solidFill>
+                  <a:srgbClr val="14274E"/>
+                </a:solidFill>
+                <a:latin typeface="Clear Sans Bold"/>
+                <a:ea typeface="Clear Sans Bold"/>
+                <a:cs typeface="Clear Sans Bold"/>
+                <a:sym typeface="Clear Sans Bold"/>
+              </a:rPr>
+              <a:t>trong</a:t>
+            </a:r>
+            <a:r>
+              <a:rPr lang="en-US" sz="2000" b="1" dirty="0">
+                <a:solidFill>
+                  <a:srgbClr val="14274E"/>
+                </a:solidFill>
+                <a:latin typeface="Clear Sans Bold"/>
+                <a:ea typeface="Clear Sans Bold"/>
+                <a:cs typeface="Clear Sans Bold"/>
+                <a:sym typeface="Clear Sans Bold"/>
+              </a:rPr>
+              <a:t> </a:t>
+            </a:r>
+            <a:r>
+              <a:rPr lang="en-US" sz="2000" b="1" dirty="0" err="1">
+                <a:solidFill>
+                  <a:srgbClr val="14274E"/>
+                </a:solidFill>
+                <a:latin typeface="Clear Sans Bold"/>
+                <a:ea typeface="Clear Sans Bold"/>
+                <a:cs typeface="Clear Sans Bold"/>
+                <a:sym typeface="Clear Sans Bold"/>
+              </a:rPr>
+              <a:t>từng</a:t>
+            </a:r>
+            <a:r>
+              <a:rPr lang="en-US" sz="2000" b="1" dirty="0">
+                <a:solidFill>
+                  <a:srgbClr val="14274E"/>
+                </a:solidFill>
+                <a:latin typeface="Clear Sans Bold"/>
+                <a:ea typeface="Clear Sans Bold"/>
+                <a:cs typeface="Clear Sans Bold"/>
+                <a:sym typeface="Clear Sans Bold"/>
+              </a:rPr>
+              <a:t> </a:t>
+            </a:r>
+            <a:r>
+              <a:rPr lang="en-US" sz="2000" b="1" dirty="0" err="1">
+                <a:solidFill>
+                  <a:srgbClr val="14274E"/>
+                </a:solidFill>
+                <a:latin typeface="Clear Sans Bold"/>
+                <a:ea typeface="Clear Sans Bold"/>
+                <a:cs typeface="Clear Sans Bold"/>
+                <a:sym typeface="Clear Sans Bold"/>
+              </a:rPr>
+              <a:t>khung</a:t>
+            </a:r>
+            <a:r>
+              <a:rPr lang="en-US" sz="2000" b="1" dirty="0">
+                <a:solidFill>
+                  <a:srgbClr val="14274E"/>
+                </a:solidFill>
+                <a:latin typeface="Clear Sans Bold"/>
+                <a:ea typeface="Clear Sans Bold"/>
+                <a:cs typeface="Clear Sans Bold"/>
+                <a:sym typeface="Clear Sans Bold"/>
+              </a:rPr>
+              <a:t> </a:t>
+            </a:r>
+            <a:r>
+              <a:rPr lang="en-US" sz="2000" b="1" dirty="0" err="1">
+                <a:solidFill>
+                  <a:srgbClr val="14274E"/>
+                </a:solidFill>
+                <a:latin typeface="Clear Sans Bold"/>
+                <a:ea typeface="Clear Sans Bold"/>
+                <a:cs typeface="Clear Sans Bold"/>
+                <a:sym typeface="Clear Sans Bold"/>
+              </a:rPr>
+              <a:t>hình</a:t>
+            </a:r>
+            <a:r>
+              <a:rPr lang="en-US" sz="2000" b="1" dirty="0">
+                <a:solidFill>
+                  <a:srgbClr val="14274E"/>
+                </a:solidFill>
+                <a:latin typeface="Clear Sans Bold"/>
+                <a:ea typeface="Clear Sans Bold"/>
+                <a:cs typeface="Clear Sans Bold"/>
+                <a:sym typeface="Clear Sans Bold"/>
+              </a:rPr>
+              <a:t> </a:t>
+            </a:r>
+            <a:r>
+              <a:rPr lang="en-US" sz="2000" b="1" dirty="0" err="1">
+                <a:solidFill>
+                  <a:srgbClr val="14274E"/>
+                </a:solidFill>
+                <a:latin typeface="Clear Sans Bold"/>
+                <a:ea typeface="Clear Sans Bold"/>
+                <a:cs typeface="Clear Sans Bold"/>
+                <a:sym typeface="Clear Sans Bold"/>
+              </a:rPr>
+              <a:t>của</a:t>
+            </a:r>
+            <a:r>
+              <a:rPr lang="en-US" sz="2000" b="1" dirty="0">
+                <a:solidFill>
+                  <a:srgbClr val="14274E"/>
+                </a:solidFill>
+                <a:latin typeface="Clear Sans Bold"/>
+                <a:ea typeface="Clear Sans Bold"/>
+                <a:cs typeface="Clear Sans Bold"/>
+                <a:sym typeface="Clear Sans Bold"/>
+              </a:rPr>
+              <a:t> video.</a:t>
             </a:r>
           </a:p>
           <a:p>
@@ -5215,16 +6305,88 @@
               <a:buAutoNum type="arabicPeriod"/>
             </a:pPr>
             <a:r>
-              <a:rPr lang="en-US" sz="2000" b="1">
-                <a:solidFill>
-                  <a:srgbClr val="14274E"/>
-                </a:solidFill>
-                <a:latin typeface="Clear Sans Bold"/>
-                <a:ea typeface="Clear Sans Bold"/>
-                <a:cs typeface="Clear Sans Bold"/>
-                <a:sym typeface="Clear Sans Bold"/>
-              </a:rPr>
-              <a:t>Theo dõi phương tiện (Tracking):</a:t>
+              <a:rPr lang="en-US" sz="2000" b="1" dirty="0">
+                <a:solidFill>
+                  <a:srgbClr val="14274E"/>
+                </a:solidFill>
+                <a:latin typeface="Clear Sans Bold"/>
+                <a:ea typeface="Clear Sans Bold"/>
+                <a:cs typeface="Clear Sans Bold"/>
+                <a:sym typeface="Clear Sans Bold"/>
+              </a:rPr>
+              <a:t>Theo </a:t>
+            </a:r>
+            <a:r>
+              <a:rPr lang="en-US" sz="2000" b="1" dirty="0" err="1">
+                <a:solidFill>
+                  <a:srgbClr val="14274E"/>
+                </a:solidFill>
+                <a:latin typeface="Clear Sans Bold"/>
+                <a:ea typeface="Clear Sans Bold"/>
+                <a:cs typeface="Clear Sans Bold"/>
+                <a:sym typeface="Clear Sans Bold"/>
+              </a:rPr>
+              <a:t>dõi</a:t>
+            </a:r>
+            <a:r>
+              <a:rPr lang="en-US" sz="2000" b="1" dirty="0">
+                <a:solidFill>
+                  <a:srgbClr val="14274E"/>
+                </a:solidFill>
+                <a:latin typeface="Clear Sans Bold"/>
+                <a:ea typeface="Clear Sans Bold"/>
+                <a:cs typeface="Clear Sans Bold"/>
+                <a:sym typeface="Clear Sans Bold"/>
+              </a:rPr>
+              <a:t> </a:t>
+            </a:r>
+            <a:r>
+              <a:rPr lang="en-US" sz="2000" b="1" dirty="0" err="1">
+                <a:solidFill>
+                  <a:srgbClr val="14274E"/>
+                </a:solidFill>
+                <a:latin typeface="Clear Sans Bold"/>
+                <a:ea typeface="Clear Sans Bold"/>
+                <a:cs typeface="Clear Sans Bold"/>
+                <a:sym typeface="Clear Sans Bold"/>
+              </a:rPr>
+              <a:t>phương</a:t>
+            </a:r>
+            <a:r>
+              <a:rPr lang="en-US" sz="2000" b="1" dirty="0">
+                <a:solidFill>
+                  <a:srgbClr val="14274E"/>
+                </a:solidFill>
+                <a:latin typeface="Clear Sans Bold"/>
+                <a:ea typeface="Clear Sans Bold"/>
+                <a:cs typeface="Clear Sans Bold"/>
+                <a:sym typeface="Clear Sans Bold"/>
+              </a:rPr>
+              <a:t> </a:t>
+            </a:r>
+            <a:r>
+              <a:rPr lang="en-US" sz="2000" b="1" dirty="0" err="1">
+                <a:solidFill>
+                  <a:srgbClr val="14274E"/>
+                </a:solidFill>
+                <a:latin typeface="Clear Sans Bold"/>
+                <a:ea typeface="Clear Sans Bold"/>
+                <a:cs typeface="Clear Sans Bold"/>
+                <a:sym typeface="Clear Sans Bold"/>
+              </a:rPr>
+              <a:t>tiện</a:t>
+            </a:r>
+            <a:r>
+              <a:rPr lang="en-US" sz="2000" b="1" dirty="0">
+                <a:solidFill>
+                  <a:srgbClr val="14274E"/>
+                </a:solidFill>
+                <a:latin typeface="Clear Sans Bold"/>
+                <a:ea typeface="Clear Sans Bold"/>
+                <a:cs typeface="Clear Sans Bold"/>
+                <a:sym typeface="Clear Sans Bold"/>
+              </a:rPr>
+              <a:t> (Tracking):</a:t>
             </a:r>
           </a:p>
           <a:p>
@@ -5236,16 +6398,388 @@
               <a:buChar char="⚬"/>
             </a:pPr>
             <a:r>
-              <a:rPr lang="en-US" sz="2000" b="1">
-                <a:solidFill>
-                  <a:srgbClr val="14274E"/>
-                </a:solidFill>
-                <a:latin typeface="Clear Sans Bold"/>
-                <a:ea typeface="Clear Sans Bold"/>
-                <a:cs typeface="Clear Sans Bold"/>
-                <a:sym typeface="Clear Sans Bold"/>
-              </a:rPr>
-              <a:t>Áp dụng thuật toán ByteTrack để gán ID và theo dõi các phương tiện qua các khung hình.</a:t>
+              <a:rPr lang="en-US" sz="2000" b="1" dirty="0" err="1">
+                <a:solidFill>
+                  <a:srgbClr val="14274E"/>
+                </a:solidFill>
+                <a:latin typeface="Clear Sans Bold"/>
+                <a:ea typeface="Clear Sans Bold"/>
+                <a:cs typeface="Clear Sans Bold"/>
+                <a:sym typeface="Clear Sans Bold"/>
+              </a:rPr>
+              <a:t>Áp</a:t>
+            </a:r>
+            <a:r>
+              <a:rPr lang="en-US" sz="2000" b="1" dirty="0">
+                <a:solidFill>
+                  <a:srgbClr val="14274E"/>
+                </a:solidFill>
+                <a:latin typeface="Clear Sans Bold"/>
+                <a:ea typeface="Clear Sans Bold"/>
+                <a:cs typeface="Clear Sans Bold"/>
+                <a:sym typeface="Clear Sans Bold"/>
+              </a:rPr>
+              <a:t> </a:t>
+            </a:r>
+            <a:r>
+              <a:rPr lang="en-US" sz="2000" b="1" dirty="0" err="1">
+                <a:solidFill>
+                  <a:srgbClr val="14274E"/>
+                </a:solidFill>
+                <a:latin typeface="Clear Sans Bold"/>
+                <a:ea typeface="Clear Sans Bold"/>
+                <a:cs typeface="Clear Sans Bold"/>
+                <a:sym typeface="Clear Sans Bold"/>
+              </a:rPr>
+              <a:t>dụng</a:t>
+            </a:r>
+            <a:r>
+              <a:rPr lang="en-US" sz="2000" b="1" dirty="0">
+                <a:solidFill>
+                  <a:srgbClr val="14274E"/>
+                </a:solidFill>
+                <a:latin typeface="Clear Sans Bold"/>
+                <a:ea typeface="Clear Sans Bold"/>
+                <a:cs typeface="Clear Sans Bold"/>
+                <a:sym typeface="Clear Sans Bold"/>
+              </a:rPr>
+              <a:t> </a:t>
+            </a:r>
+            <a:r>
+              <a:rPr lang="en-US" sz="2000" b="1" dirty="0" err="1">
+                <a:solidFill>
+                  <a:srgbClr val="14274E"/>
+                </a:solidFill>
+                <a:latin typeface="Clear Sans Bold"/>
+                <a:ea typeface="Clear Sans Bold"/>
+                <a:cs typeface="Clear Sans Bold"/>
+                <a:sym typeface="Clear Sans Bold"/>
+              </a:rPr>
+              <a:t>thuật</a:t>
+            </a:r>
+            <a:r>
+              <a:rPr lang="en-US" sz="2000" b="1" dirty="0">
+                <a:solidFill>
+                  <a:srgbClr val="14274E"/>
+                </a:solidFill>
+                <a:latin typeface="Clear Sans Bold"/>
+                <a:ea typeface="Clear Sans Bold"/>
+                <a:cs typeface="Clear Sans Bold"/>
+                <a:sym typeface="Clear Sans Bold"/>
+              </a:rPr>
+              <a:t> </a:t>
+            </a:r>
+            <a:r>
+              <a:rPr lang="en-US" sz="2000" b="1" dirty="0" err="1">
+                <a:solidFill>
+                  <a:srgbClr val="14274E"/>
+                </a:solidFill>
+                <a:latin typeface="Clear Sans Bold"/>
+                <a:ea typeface="Clear Sans Bold"/>
+                <a:cs typeface="Clear Sans Bold"/>
+                <a:sym typeface="Clear Sans Bold"/>
+              </a:rPr>
+              <a:t>toán</a:t>
+            </a:r>
+            <a:r>
+              <a:rPr lang="en-US" sz="2000" b="1" dirty="0">
+                <a:solidFill>
+                  <a:srgbClr val="14274E"/>
+                </a:solidFill>
+                <a:latin typeface="Clear Sans Bold"/>
+                <a:ea typeface="Clear Sans Bold"/>
+                <a:cs typeface="Clear Sans Bold"/>
+                <a:sym typeface="Clear Sans Bold"/>
+              </a:rPr>
+              <a:t> </a:t>
+            </a:r>
+            <a:r>
+              <a:rPr lang="en-US" sz="2000" b="1" dirty="0" err="1">
+                <a:solidFill>
+                  <a:srgbClr val="14274E"/>
+                </a:solidFill>
+                <a:latin typeface="Clear Sans Bold"/>
+                <a:ea typeface="Clear Sans Bold"/>
+                <a:cs typeface="Clear Sans Bold"/>
+                <a:sym typeface="Clear Sans Bold"/>
+              </a:rPr>
+              <a:t>ByteTrack</a:t>
+            </a:r>
+            <a:r>
+              <a:rPr lang="en-US" sz="2000" b="1" dirty="0">
+                <a:solidFill>
+                  <a:srgbClr val="14274E"/>
+                </a:solidFill>
+                <a:latin typeface="Clear Sans Bold"/>
+                <a:ea typeface="Clear Sans Bold"/>
+                <a:cs typeface="Clear Sans Bold"/>
+                <a:sym typeface="Clear Sans Bold"/>
+              </a:rPr>
+              <a:t> </a:t>
+            </a:r>
+            <a:r>
+              <a:rPr lang="en-US" sz="2000" b="1" dirty="0" err="1">
+                <a:solidFill>
+                  <a:srgbClr val="14274E"/>
+                </a:solidFill>
+                <a:latin typeface="Clear Sans Bold"/>
+                <a:ea typeface="Clear Sans Bold"/>
+                <a:cs typeface="Clear Sans Bold"/>
+                <a:sym typeface="Clear Sans Bold"/>
+              </a:rPr>
+              <a:t>để</a:t>
+            </a:r>
+            <a:r>
+              <a:rPr lang="en-US" sz="2000" b="1" dirty="0">
+                <a:solidFill>
+                  <a:srgbClr val="14274E"/>
+                </a:solidFill>
+                <a:latin typeface="Clear Sans Bold"/>
+                <a:ea typeface="Clear Sans Bold"/>
+                <a:cs typeface="Clear Sans Bold"/>
+                <a:sym typeface="Clear Sans Bold"/>
+              </a:rPr>
+              <a:t> </a:t>
+            </a:r>
+            <a:r>
+              <a:rPr lang="en-US" sz="2000" b="1" dirty="0" err="1">
+                <a:solidFill>
+                  <a:srgbClr val="14274E"/>
+                </a:solidFill>
+                <a:latin typeface="Clear Sans Bold"/>
+                <a:ea typeface="Clear Sans Bold"/>
+                <a:cs typeface="Clear Sans Bold"/>
+                <a:sym typeface="Clear Sans Bold"/>
+              </a:rPr>
+              <a:t>gán</a:t>
+            </a:r>
+            <a:r>
+              <a:rPr lang="en-US" sz="2000" b="1" dirty="0">
+                <a:solidFill>
+                  <a:srgbClr val="14274E"/>
+                </a:solidFill>
+                <a:latin typeface="Clear Sans Bold"/>
+                <a:ea typeface="Clear Sans Bold"/>
+                <a:cs typeface="Clear Sans Bold"/>
+                <a:sym typeface="Clear Sans Bold"/>
+              </a:rPr>
+              <a:t> ID </a:t>
+            </a:r>
+            <a:r>
+              <a:rPr lang="en-US" sz="2000" b="1" dirty="0" err="1">
+                <a:solidFill>
+                  <a:srgbClr val="14274E"/>
+                </a:solidFill>
+                <a:latin typeface="Clear Sans Bold"/>
+                <a:ea typeface="Clear Sans Bold"/>
+                <a:cs typeface="Clear Sans Bold"/>
+                <a:sym typeface="Clear Sans Bold"/>
+              </a:rPr>
+              <a:t>và</a:t>
+            </a:r>
+            <a:r>
+              <a:rPr lang="en-US" sz="2000" b="1" dirty="0">
+                <a:solidFill>
+                  <a:srgbClr val="14274E"/>
+                </a:solidFill>
+                <a:latin typeface="Clear Sans Bold"/>
+                <a:ea typeface="Clear Sans Bold"/>
+                <a:cs typeface="Clear Sans Bold"/>
+                <a:sym typeface="Clear Sans Bold"/>
+              </a:rPr>
+              <a:t> </a:t>
+            </a:r>
+            <a:r>
+              <a:rPr lang="en-US" sz="2000" b="1" dirty="0" err="1">
+                <a:solidFill>
+                  <a:srgbClr val="14274E"/>
+                </a:solidFill>
+                <a:latin typeface="Clear Sans Bold"/>
+                <a:ea typeface="Clear Sans Bold"/>
+                <a:cs typeface="Clear Sans Bold"/>
+                <a:sym typeface="Clear Sans Bold"/>
+              </a:rPr>
+              <a:t>theo</a:t>
+            </a:r>
+            <a:r>
+              <a:rPr lang="en-US" sz="2000" b="1" dirty="0">
+                <a:solidFill>
+                  <a:srgbClr val="14274E"/>
+                </a:solidFill>
+                <a:latin typeface="Clear Sans Bold"/>
+                <a:ea typeface="Clear Sans Bold"/>
+                <a:cs typeface="Clear Sans Bold"/>
+                <a:sym typeface="Clear Sans Bold"/>
+              </a:rPr>
+              <a:t> </a:t>
+            </a:r>
+            <a:r>
+              <a:rPr lang="en-US" sz="2000" b="1" dirty="0" err="1">
+                <a:solidFill>
+                  <a:srgbClr val="14274E"/>
+                </a:solidFill>
+                <a:latin typeface="Clear Sans Bold"/>
+                <a:ea typeface="Clear Sans Bold"/>
+                <a:cs typeface="Clear Sans Bold"/>
+                <a:sym typeface="Clear Sans Bold"/>
+              </a:rPr>
+              <a:t>dõi</a:t>
+            </a:r>
+            <a:r>
+              <a:rPr lang="en-US" sz="2000" b="1" dirty="0">
+                <a:solidFill>
+                  <a:srgbClr val="14274E"/>
+                </a:solidFill>
+                <a:latin typeface="Clear Sans Bold"/>
+                <a:ea typeface="Clear Sans Bold"/>
+                <a:cs typeface="Clear Sans Bold"/>
+                <a:sym typeface="Clear Sans Bold"/>
+              </a:rPr>
+              <a:t> </a:t>
+            </a:r>
+            <a:r>
+              <a:rPr lang="en-US" sz="2000" b="1" dirty="0" err="1">
+                <a:solidFill>
+                  <a:srgbClr val="14274E"/>
+                </a:solidFill>
+                <a:latin typeface="Clear Sans Bold"/>
+                <a:ea typeface="Clear Sans Bold"/>
+                <a:cs typeface="Clear Sans Bold"/>
+                <a:sym typeface="Clear Sans Bold"/>
+              </a:rPr>
+              <a:t>các</a:t>
+            </a:r>
+            <a:r>
+              <a:rPr lang="en-US" sz="2000" b="1" dirty="0">
+                <a:solidFill>
+                  <a:srgbClr val="14274E"/>
+                </a:solidFill>
+                <a:latin typeface="Clear Sans Bold"/>
+                <a:ea typeface="Clear Sans Bold"/>
+                <a:cs typeface="Clear Sans Bold"/>
+                <a:sym typeface="Clear Sans Bold"/>
+              </a:rPr>
+              <a:t> </a:t>
+            </a:r>
+            <a:r>
+              <a:rPr lang="en-US" sz="2000" b="1" dirty="0" err="1">
+                <a:solidFill>
+                  <a:srgbClr val="14274E"/>
+                </a:solidFill>
+                <a:latin typeface="Clear Sans Bold"/>
+                <a:ea typeface="Clear Sans Bold"/>
+                <a:cs typeface="Clear Sans Bold"/>
+                <a:sym typeface="Clear Sans Bold"/>
+              </a:rPr>
+              <a:t>phương</a:t>
+            </a:r>
+            <a:r>
+              <a:rPr lang="en-US" sz="2000" b="1" dirty="0">
+                <a:solidFill>
+                  <a:srgbClr val="14274E"/>
+                </a:solidFill>
+                <a:latin typeface="Clear Sans Bold"/>
+                <a:ea typeface="Clear Sans Bold"/>
+                <a:cs typeface="Clear Sans Bold"/>
+                <a:sym typeface="Clear Sans Bold"/>
+              </a:rPr>
+              <a:t> </a:t>
+            </a:r>
+            <a:r>
+              <a:rPr lang="en-US" sz="2000" b="1" dirty="0" err="1">
+                <a:solidFill>
+                  <a:srgbClr val="14274E"/>
+                </a:solidFill>
+                <a:latin typeface="Clear Sans Bold"/>
+                <a:ea typeface="Clear Sans Bold"/>
+                <a:cs typeface="Clear Sans Bold"/>
+                <a:sym typeface="Clear Sans Bold"/>
+              </a:rPr>
+              <a:t>tiện</a:t>
+            </a:r>
+            <a:r>
+              <a:rPr lang="en-US" sz="2000" b="1" dirty="0">
+                <a:solidFill>
+                  <a:srgbClr val="14274E"/>
+                </a:solidFill>
+                <a:latin typeface="Clear Sans Bold"/>
+                <a:ea typeface="Clear Sans Bold"/>
+                <a:cs typeface="Clear Sans Bold"/>
+                <a:sym typeface="Clear Sans Bold"/>
+              </a:rPr>
+              <a:t> qua </a:t>
+            </a:r>
+            <a:r>
+              <a:rPr lang="en-US" sz="2000" b="1" dirty="0" err="1">
+                <a:solidFill>
+                  <a:srgbClr val="14274E"/>
+                </a:solidFill>
+                <a:latin typeface="Clear Sans Bold"/>
+                <a:ea typeface="Clear Sans Bold"/>
+                <a:cs typeface="Clear Sans Bold"/>
+                <a:sym typeface="Clear Sans Bold"/>
+              </a:rPr>
+              <a:t>các</a:t>
+            </a:r>
+            <a:r>
+              <a:rPr lang="en-US" sz="2000" b="1" dirty="0">
+                <a:solidFill>
+                  <a:srgbClr val="14274E"/>
+                </a:solidFill>
+                <a:latin typeface="Clear Sans Bold"/>
+                <a:ea typeface="Clear Sans Bold"/>
+                <a:cs typeface="Clear Sans Bold"/>
+                <a:sym typeface="Clear Sans Bold"/>
+              </a:rPr>
+              <a:t> </a:t>
+            </a:r>
+            <a:r>
+              <a:rPr lang="en-US" sz="2000" b="1" dirty="0" err="1">
+                <a:solidFill>
+                  <a:srgbClr val="14274E"/>
+                </a:solidFill>
+                <a:latin typeface="Clear Sans Bold"/>
+                <a:ea typeface="Clear Sans Bold"/>
+                <a:cs typeface="Clear Sans Bold"/>
+                <a:sym typeface="Clear Sans Bold"/>
+              </a:rPr>
+              <a:t>khung</a:t>
+            </a:r>
+            <a:r>
+              <a:rPr lang="en-US" sz="2000" b="1" dirty="0">
+                <a:solidFill>
+                  <a:srgbClr val="14274E"/>
+                </a:solidFill>
+                <a:latin typeface="Clear Sans Bold"/>
+                <a:ea typeface="Clear Sans Bold"/>
+                <a:cs typeface="Clear Sans Bold"/>
+                <a:sym typeface="Clear Sans Bold"/>
+              </a:rPr>
+              <a:t> </a:t>
+            </a:r>
+            <a:r>
+              <a:rPr lang="en-US" sz="2000" b="1" dirty="0" err="1">
+                <a:solidFill>
+                  <a:srgbClr val="14274E"/>
+                </a:solidFill>
+                <a:latin typeface="Clear Sans Bold"/>
+                <a:ea typeface="Clear Sans Bold"/>
+                <a:cs typeface="Clear Sans Bold"/>
+                <a:sym typeface="Clear Sans Bold"/>
+              </a:rPr>
+              <a:t>hình</a:t>
+            </a:r>
+            <a:r>
+              <a:rPr lang="en-US" sz="2000" b="1" dirty="0">
+                <a:solidFill>
+                  <a:srgbClr val="14274E"/>
+                </a:solidFill>
+                <a:latin typeface="Clear Sans Bold"/>
+                <a:ea typeface="Clear Sans Bold"/>
+                <a:cs typeface="Clear Sans Bold"/>
+                <a:sym typeface="Clear Sans Bold"/>
+              </a:rPr>
+              <a:t>.</a:t>
             </a:r>
           </a:p>
           <a:p>
@@ -5256,16 +6790,124 @@
               <a:buAutoNum type="arabicPeriod"/>
             </a:pPr>
             <a:r>
-              <a:rPr lang="en-US" sz="2000" b="1">
-                <a:solidFill>
-                  <a:srgbClr val="14274E"/>
-                </a:solidFill>
-                <a:latin typeface="Clear Sans Bold"/>
-                <a:ea typeface="Clear Sans Bold"/>
-                <a:cs typeface="Clear Sans Bold"/>
-                <a:sym typeface="Clear Sans Bold"/>
-              </a:rPr>
-              <a:t>Gán biển số với ID xe:</a:t>
+              <a:rPr lang="en-US" sz="2000" b="1" dirty="0" err="1">
+                <a:solidFill>
+                  <a:srgbClr val="14274E"/>
+                </a:solidFill>
+                <a:latin typeface="Clear Sans Bold"/>
+                <a:ea typeface="Clear Sans Bold"/>
+                <a:cs typeface="Clear Sans Bold"/>
+                <a:sym typeface="Clear Sans Bold"/>
+              </a:rPr>
+              <a:t>Gán</a:t>
+            </a:r>
+            <a:r>
+              <a:rPr lang="en-US" sz="2000" b="1" dirty="0">
+                <a:solidFill>
+                  <a:srgbClr val="14274E"/>
+                </a:solidFill>
+                <a:latin typeface="Clear Sans Bold"/>
+                <a:ea typeface="Clear Sans Bold"/>
+                <a:cs typeface="Clear Sans Bold"/>
+                <a:sym typeface="Clear Sans Bold"/>
+              </a:rPr>
+              <a:t> </a:t>
+            </a:r>
+            <a:r>
+              <a:rPr lang="en-US" sz="2000" b="1" dirty="0" err="1">
+                <a:solidFill>
+                  <a:srgbClr val="14274E"/>
+                </a:solidFill>
+                <a:latin typeface="Clear Sans Bold"/>
+                <a:ea typeface="Clear Sans Bold"/>
+                <a:cs typeface="Clear Sans Bold"/>
+                <a:sym typeface="Clear Sans Bold"/>
+              </a:rPr>
+              <a:t>biển</a:t>
+            </a:r>
+            <a:r>
+              <a:rPr lang="en-US" sz="2000" b="1" dirty="0">
+                <a:solidFill>
+                  <a:srgbClr val="14274E"/>
+                </a:solidFill>
+                <a:latin typeface="Clear Sans Bold"/>
+                <a:ea typeface="Clear Sans Bold"/>
+                <a:cs typeface="Clear Sans Bold"/>
+                <a:sym typeface="Clear Sans Bold"/>
+              </a:rPr>
+              <a:t> </a:t>
+            </a:r>
+            <a:r>
+              <a:rPr lang="en-US" sz="2000" b="1" dirty="0" err="1">
+                <a:solidFill>
+                  <a:srgbClr val="14274E"/>
+                </a:solidFill>
+                <a:latin typeface="Clear Sans Bold"/>
+                <a:ea typeface="Clear Sans Bold"/>
+                <a:cs typeface="Clear Sans Bold"/>
+                <a:sym typeface="Clear Sans Bold"/>
+              </a:rPr>
+              <a:t>số</a:t>
+            </a:r>
+            <a:r>
+              <a:rPr lang="en-US" sz="2000" b="1" dirty="0">
+                <a:solidFill>
+                  <a:srgbClr val="14274E"/>
+                </a:solidFill>
+                <a:latin typeface="Clear Sans Bold"/>
+                <a:ea typeface="Clear Sans Bold"/>
+                <a:cs typeface="Clear Sans Bold"/>
+                <a:sym typeface="Clear Sans Bold"/>
+              </a:rPr>
+              <a:t> </a:t>
+            </a:r>
+            <a:r>
+              <a:rPr lang="en-US" sz="2000" b="1" dirty="0" err="1">
+                <a:solidFill>
+                  <a:srgbClr val="14274E"/>
+                </a:solidFill>
+                <a:latin typeface="Clear Sans Bold"/>
+                <a:ea typeface="Clear Sans Bold"/>
+                <a:cs typeface="Clear Sans Bold"/>
+                <a:sym typeface="Clear Sans Bold"/>
+              </a:rPr>
+              <a:t>với</a:t>
+            </a:r>
+            <a:r>
+              <a:rPr lang="en-US" sz="2000" b="1" dirty="0">
+                <a:solidFill>
+                  <a:srgbClr val="14274E"/>
+                </a:solidFill>
+                <a:latin typeface="Clear Sans Bold"/>
+                <a:ea typeface="Clear Sans Bold"/>
+                <a:cs typeface="Clear Sans Bold"/>
+                <a:sym typeface="Clear Sans Bold"/>
+              </a:rPr>
+              <a:t> ID </a:t>
+            </a:r>
+            <a:r>
+              <a:rPr lang="en-US" sz="2000" b="1" dirty="0" err="1">
+                <a:solidFill>
+                  <a:srgbClr val="14274E"/>
+                </a:solidFill>
+                <a:latin typeface="Clear Sans Bold"/>
+                <a:ea typeface="Clear Sans Bold"/>
+                <a:cs typeface="Clear Sans Bold"/>
+                <a:sym typeface="Clear Sans Bold"/>
+              </a:rPr>
+              <a:t>xe</a:t>
+            </a:r>
+            <a:r>
+              <a:rPr lang="en-US" sz="2000" b="1" dirty="0">
+                <a:solidFill>
+                  <a:srgbClr val="14274E"/>
+                </a:solidFill>
+                <a:latin typeface="Clear Sans Bold"/>
+                <a:ea typeface="Clear Sans Bold"/>
+                <a:cs typeface="Clear Sans Bold"/>
+                <a:sym typeface="Clear Sans Bold"/>
+              </a:rPr>
+              <a:t>:</a:t>
             </a:r>
           </a:p>
           <a:p>
@@ -5277,16 +6919,532 @@
               <a:buChar char="⚬"/>
             </a:pPr>
             <a:r>
-              <a:rPr lang="en-US" sz="2000" b="1">
-                <a:solidFill>
-                  <a:srgbClr val="14274E"/>
-                </a:solidFill>
-                <a:latin typeface="Clear Sans Bold"/>
-                <a:ea typeface="Clear Sans Bold"/>
-                <a:cs typeface="Clear Sans Bold"/>
-                <a:sym typeface="Clear Sans Bold"/>
-              </a:rPr>
-              <a:t>Mỗi biển số được gắn với đúng ID của xe nếu tọa độ trung tâm biển nằm trong bounding box của phương tiện đang được track.</a:t>
+              <a:rPr lang="en-US" sz="2000" b="1" dirty="0" err="1">
+                <a:solidFill>
+                  <a:srgbClr val="14274E"/>
+                </a:solidFill>
+                <a:latin typeface="Clear Sans Bold"/>
+                <a:ea typeface="Clear Sans Bold"/>
+                <a:cs typeface="Clear Sans Bold"/>
+                <a:sym typeface="Clear Sans Bold"/>
+              </a:rPr>
+              <a:t>Mỗi</a:t>
+            </a:r>
+            <a:r>
+              <a:rPr lang="en-US" sz="2000" b="1" dirty="0">
+                <a:solidFill>
+                  <a:srgbClr val="14274E"/>
+                </a:solidFill>
+                <a:latin typeface="Clear Sans Bold"/>
+                <a:ea typeface="Clear Sans Bold"/>
+                <a:cs typeface="Clear Sans Bold"/>
+                <a:sym typeface="Clear Sans Bold"/>
+              </a:rPr>
+              <a:t> </a:t>
+            </a:r>
+            <a:r>
+              <a:rPr lang="en-US" sz="2000" b="1" dirty="0" err="1">
+                <a:solidFill>
+                  <a:srgbClr val="14274E"/>
+                </a:solidFill>
+                <a:latin typeface="Clear Sans Bold"/>
+                <a:ea typeface="Clear Sans Bold"/>
+                <a:cs typeface="Clear Sans Bold"/>
+                <a:sym typeface="Clear Sans Bold"/>
+              </a:rPr>
+              <a:t>biển</a:t>
+            </a:r>
+            <a:r>
+              <a:rPr lang="en-US" sz="2000" b="1" dirty="0">
+                <a:solidFill>
+                  <a:srgbClr val="14274E"/>
+                </a:solidFill>
+                <a:latin typeface="Clear Sans Bold"/>
+                <a:ea typeface="Clear Sans Bold"/>
+                <a:cs typeface="Clear Sans Bold"/>
+                <a:sym typeface="Clear Sans Bold"/>
+              </a:rPr>
+              <a:t> </a:t>
+            </a:r>
+            <a:r>
+              <a:rPr lang="en-US" sz="2000" b="1" dirty="0" err="1">
+                <a:solidFill>
+                  <a:srgbClr val="14274E"/>
+                </a:solidFill>
+                <a:latin typeface="Clear Sans Bold"/>
+                <a:ea typeface="Clear Sans Bold"/>
+                <a:cs typeface="Clear Sans Bold"/>
+                <a:sym typeface="Clear Sans Bold"/>
+              </a:rPr>
+              <a:t>số</a:t>
+            </a:r>
+            <a:r>
+              <a:rPr lang="en-US" sz="2000" b="1" dirty="0">
+                <a:solidFill>
+                  <a:srgbClr val="14274E"/>
+                </a:solidFill>
+                <a:latin typeface="Clear Sans Bold"/>
+                <a:ea typeface="Clear Sans Bold"/>
+                <a:cs typeface="Clear Sans Bold"/>
+                <a:sym typeface="Clear Sans Bold"/>
+              </a:rPr>
+              <a:t> </a:t>
+            </a:r>
+            <a:r>
+              <a:rPr lang="en-US" sz="2000" b="1" dirty="0" err="1">
+                <a:solidFill>
+                  <a:srgbClr val="14274E"/>
+                </a:solidFill>
+                <a:latin typeface="Clear Sans Bold"/>
+                <a:ea typeface="Clear Sans Bold"/>
+                <a:cs typeface="Clear Sans Bold"/>
+                <a:sym typeface="Clear Sans Bold"/>
+              </a:rPr>
+              <a:t>được</a:t>
+            </a:r>
+            <a:r>
+              <a:rPr lang="en-US" sz="2000" b="1" dirty="0">
+                <a:solidFill>
+                  <a:srgbClr val="14274E"/>
+                </a:solidFill>
+                <a:latin typeface="Clear Sans Bold"/>
+                <a:ea typeface="Clear Sans Bold"/>
+                <a:cs typeface="Clear Sans Bold"/>
+                <a:sym typeface="Clear Sans Bold"/>
+              </a:rPr>
+              <a:t> </a:t>
+            </a:r>
+            <a:r>
+              <a:rPr lang="en-US" sz="2000" b="1" dirty="0" err="1">
+                <a:solidFill>
+                  <a:srgbClr val="14274E"/>
+                </a:solidFill>
+                <a:latin typeface="Clear Sans Bold"/>
+                <a:ea typeface="Clear Sans Bold"/>
+                <a:cs typeface="Clear Sans Bold"/>
+                <a:sym typeface="Clear Sans Bold"/>
+              </a:rPr>
+              <a:t>gắn</a:t>
+            </a:r>
+            <a:r>
+              <a:rPr lang="en-US" sz="2000" b="1" dirty="0">
+                <a:solidFill>
+                  <a:srgbClr val="14274E"/>
+                </a:solidFill>
+                <a:latin typeface="Clear Sans Bold"/>
+                <a:ea typeface="Clear Sans Bold"/>
+                <a:cs typeface="Clear Sans Bold"/>
+                <a:sym typeface="Clear Sans Bold"/>
+              </a:rPr>
+              <a:t> </a:t>
+            </a:r>
+            <a:r>
+              <a:rPr lang="en-US" sz="2000" b="1" dirty="0" err="1">
+                <a:solidFill>
+                  <a:srgbClr val="14274E"/>
+                </a:solidFill>
+                <a:latin typeface="Clear Sans Bold"/>
+                <a:ea typeface="Clear Sans Bold"/>
+                <a:cs typeface="Clear Sans Bold"/>
+                <a:sym typeface="Clear Sans Bold"/>
+              </a:rPr>
+              <a:t>với</a:t>
+            </a:r>
+            <a:r>
+              <a:rPr lang="en-US" sz="2000" b="1" dirty="0">
+                <a:solidFill>
+                  <a:srgbClr val="14274E"/>
+                </a:solidFill>
+                <a:latin typeface="Clear Sans Bold"/>
+                <a:ea typeface="Clear Sans Bold"/>
+                <a:cs typeface="Clear Sans Bold"/>
+                <a:sym typeface="Clear Sans Bold"/>
+              </a:rPr>
+              <a:t> </a:t>
+            </a:r>
+            <a:r>
+              <a:rPr lang="en-US" sz="2000" b="1" dirty="0" err="1">
+                <a:solidFill>
+                  <a:srgbClr val="14274E"/>
+                </a:solidFill>
+                <a:latin typeface="Clear Sans Bold"/>
+                <a:ea typeface="Clear Sans Bold"/>
+                <a:cs typeface="Clear Sans Bold"/>
+                <a:sym typeface="Clear Sans Bold"/>
+              </a:rPr>
+              <a:t>đúng</a:t>
+            </a:r>
+            <a:r>
+              <a:rPr lang="en-US" sz="2000" b="1" dirty="0">
+                <a:solidFill>
+                  <a:srgbClr val="14274E"/>
+                </a:solidFill>
+                <a:latin typeface="Clear Sans Bold"/>
+                <a:ea typeface="Clear Sans Bold"/>
+                <a:cs typeface="Clear Sans Bold"/>
+                <a:sym typeface="Clear Sans Bold"/>
+              </a:rPr>
+              <a:t> ID </a:t>
+            </a:r>
+            <a:r>
+              <a:rPr lang="en-US" sz="2000" b="1" dirty="0" err="1">
+                <a:solidFill>
+                  <a:srgbClr val="14274E"/>
+                </a:solidFill>
+                <a:latin typeface="Clear Sans Bold"/>
+                <a:ea typeface="Clear Sans Bold"/>
+                <a:cs typeface="Clear Sans Bold"/>
+                <a:sym typeface="Clear Sans Bold"/>
+              </a:rPr>
+              <a:t>của</a:t>
+            </a:r>
+            <a:r>
+              <a:rPr lang="en-US" sz="2000" b="1" dirty="0">
+                <a:solidFill>
+                  <a:srgbClr val="14274E"/>
+                </a:solidFill>
+                <a:latin typeface="Clear Sans Bold"/>
+                <a:ea typeface="Clear Sans Bold"/>
+                <a:cs typeface="Clear Sans Bold"/>
+                <a:sym typeface="Clear Sans Bold"/>
+              </a:rPr>
+              <a:t> </a:t>
+            </a:r>
+            <a:r>
+              <a:rPr lang="en-US" sz="2000" b="1" dirty="0" err="1">
+                <a:solidFill>
+                  <a:srgbClr val="14274E"/>
+                </a:solidFill>
+                <a:latin typeface="Clear Sans Bold"/>
+                <a:ea typeface="Clear Sans Bold"/>
+                <a:cs typeface="Clear Sans Bold"/>
+                <a:sym typeface="Clear Sans Bold"/>
+              </a:rPr>
+              <a:t>xe</a:t>
+            </a:r>
+            <a:r>
+              <a:rPr lang="en-US" sz="2000" b="1" dirty="0">
+                <a:solidFill>
+                  <a:srgbClr val="14274E"/>
+                </a:solidFill>
+                <a:latin typeface="Clear Sans Bold"/>
+                <a:ea typeface="Clear Sans Bold"/>
+                <a:cs typeface="Clear Sans Bold"/>
+                <a:sym typeface="Clear Sans Bold"/>
+              </a:rPr>
+              <a:t> </a:t>
+            </a:r>
+            <a:r>
+              <a:rPr lang="en-US" sz="2000" b="1" dirty="0" err="1">
+                <a:solidFill>
+                  <a:srgbClr val="14274E"/>
+                </a:solidFill>
+                <a:latin typeface="Clear Sans Bold"/>
+                <a:ea typeface="Clear Sans Bold"/>
+                <a:cs typeface="Clear Sans Bold"/>
+                <a:sym typeface="Clear Sans Bold"/>
+              </a:rPr>
+              <a:t>nếu</a:t>
+            </a:r>
+            <a:r>
+              <a:rPr lang="en-US" sz="2000" b="1" dirty="0">
+                <a:solidFill>
+                  <a:srgbClr val="14274E"/>
+                </a:solidFill>
+                <a:latin typeface="Clear Sans Bold"/>
+                <a:ea typeface="Clear Sans Bold"/>
+                <a:cs typeface="Clear Sans Bold"/>
+                <a:sym typeface="Clear Sans Bold"/>
+              </a:rPr>
+              <a:t> </a:t>
+            </a:r>
+            <a:r>
+              <a:rPr lang="en-US" sz="2000" b="1" dirty="0" err="1">
+                <a:solidFill>
+                  <a:srgbClr val="14274E"/>
+                </a:solidFill>
+                <a:latin typeface="Clear Sans Bold"/>
+                <a:ea typeface="Clear Sans Bold"/>
+                <a:cs typeface="Clear Sans Bold"/>
+                <a:sym typeface="Clear Sans Bold"/>
+              </a:rPr>
+              <a:t>tọa</a:t>
+            </a:r>
+            <a:r>
+              <a:rPr lang="en-US" sz="2000" b="1" dirty="0">
+                <a:solidFill>
+                  <a:srgbClr val="14274E"/>
+                </a:solidFill>
+                <a:latin typeface="Clear Sans Bold"/>
+                <a:ea typeface="Clear Sans Bold"/>
+                <a:cs typeface="Clear Sans Bold"/>
+                <a:sym typeface="Clear Sans Bold"/>
+              </a:rPr>
+              <a:t> </a:t>
+            </a:r>
+            <a:r>
+              <a:rPr lang="en-US" sz="2000" b="1" dirty="0" err="1">
+                <a:solidFill>
+                  <a:srgbClr val="14274E"/>
+                </a:solidFill>
+                <a:latin typeface="Clear Sans Bold"/>
+                <a:ea typeface="Clear Sans Bold"/>
+                <a:cs typeface="Clear Sans Bold"/>
+                <a:sym typeface="Clear Sans Bold"/>
+              </a:rPr>
+              <a:t>độ</a:t>
+            </a:r>
+            <a:r>
+              <a:rPr lang="en-US" sz="2000" b="1" dirty="0">
+                <a:solidFill>
+                  <a:srgbClr val="14274E"/>
+                </a:solidFill>
+                <a:latin typeface="Clear Sans Bold"/>
+                <a:ea typeface="Clear Sans Bold"/>
+                <a:cs typeface="Clear Sans Bold"/>
+                <a:sym typeface="Clear Sans Bold"/>
+              </a:rPr>
+              <a:t> </a:t>
+            </a:r>
+            <a:r>
+              <a:rPr lang="en-US" sz="2000" b="1" dirty="0" err="1">
+                <a:solidFill>
+                  <a:srgbClr val="14274E"/>
+                </a:solidFill>
+                <a:latin typeface="Clear Sans Bold"/>
+                <a:ea typeface="Clear Sans Bold"/>
+                <a:cs typeface="Clear Sans Bold"/>
+                <a:sym typeface="Clear Sans Bold"/>
+              </a:rPr>
+              <a:t>trung</a:t>
+            </a:r>
+            <a:r>
+              <a:rPr lang="en-US" sz="2000" b="1" dirty="0">
+                <a:solidFill>
+                  <a:srgbClr val="14274E"/>
+                </a:solidFill>
+                <a:latin typeface="Clear Sans Bold"/>
+                <a:ea typeface="Clear Sans Bold"/>
+                <a:cs typeface="Clear Sans Bold"/>
+                <a:sym typeface="Clear Sans Bold"/>
+              </a:rPr>
+              <a:t> </a:t>
+            </a:r>
+            <a:r>
+              <a:rPr lang="en-US" sz="2000" b="1" dirty="0" err="1">
+                <a:solidFill>
+                  <a:srgbClr val="14274E"/>
+                </a:solidFill>
+                <a:latin typeface="Clear Sans Bold"/>
+                <a:ea typeface="Clear Sans Bold"/>
+                <a:cs typeface="Clear Sans Bold"/>
+                <a:sym typeface="Clear Sans Bold"/>
+              </a:rPr>
+              <a:t>tâm</a:t>
+            </a:r>
+            <a:r>
+              <a:rPr lang="en-US" sz="2000" b="1" dirty="0">
+                <a:solidFill>
+                  <a:srgbClr val="14274E"/>
+                </a:solidFill>
+                <a:latin typeface="Clear Sans Bold"/>
+                <a:ea typeface="Clear Sans Bold"/>
+                <a:cs typeface="Clear Sans Bold"/>
+                <a:sym typeface="Clear Sans Bold"/>
+              </a:rPr>
+              <a:t> </a:t>
+            </a:r>
+            <a:r>
+              <a:rPr lang="en-US" sz="2000" b="1" dirty="0" err="1">
+                <a:solidFill>
+                  <a:srgbClr val="14274E"/>
+                </a:solidFill>
+                <a:latin typeface="Clear Sans Bold"/>
+                <a:ea typeface="Clear Sans Bold"/>
+                <a:cs typeface="Clear Sans Bold"/>
+                <a:sym typeface="Clear Sans Bold"/>
+              </a:rPr>
+              <a:t>biển</a:t>
+            </a:r>
+            <a:r>
+              <a:rPr lang="en-US" sz="2000" b="1" dirty="0">
+                <a:solidFill>
+                  <a:srgbClr val="14274E"/>
+                </a:solidFill>
+                <a:latin typeface="Clear Sans Bold"/>
+                <a:ea typeface="Clear Sans Bold"/>
+                <a:cs typeface="Clear Sans Bold"/>
+                <a:sym typeface="Clear Sans Bold"/>
+              </a:rPr>
+              <a:t> </a:t>
+            </a:r>
+            <a:r>
+              <a:rPr lang="en-US" sz="2000" b="1" dirty="0" err="1">
+                <a:solidFill>
+                  <a:srgbClr val="14274E"/>
+                </a:solidFill>
+                <a:latin typeface="Clear Sans Bold"/>
+                <a:ea typeface="Clear Sans Bold"/>
+                <a:cs typeface="Clear Sans Bold"/>
+                <a:sym typeface="Clear Sans Bold"/>
+              </a:rPr>
+              <a:t>nằm</a:t>
+            </a:r>
+            <a:r>
+              <a:rPr lang="en-US" sz="2000" b="1" dirty="0">
+                <a:solidFill>
+                  <a:srgbClr val="14274E"/>
+                </a:solidFill>
+                <a:latin typeface="Clear Sans Bold"/>
+                <a:ea typeface="Clear Sans Bold"/>
+                <a:cs typeface="Clear Sans Bold"/>
+                <a:sym typeface="Clear Sans Bold"/>
+              </a:rPr>
+              <a:t> </a:t>
+            </a:r>
+            <a:r>
+              <a:rPr lang="en-US" sz="2000" b="1" dirty="0" err="1">
+                <a:solidFill>
+                  <a:srgbClr val="14274E"/>
+                </a:solidFill>
+                <a:latin typeface="Clear Sans Bold"/>
+                <a:ea typeface="Clear Sans Bold"/>
+                <a:cs typeface="Clear Sans Bold"/>
+                <a:sym typeface="Clear Sans Bold"/>
+              </a:rPr>
+              <a:t>trong</a:t>
+            </a:r>
+            <a:r>
+              <a:rPr lang="en-US" sz="2000" b="1" dirty="0">
+                <a:solidFill>
+                  <a:srgbClr val="14274E"/>
+                </a:solidFill>
+                <a:latin typeface="Clear Sans Bold"/>
+                <a:ea typeface="Clear Sans Bold"/>
+                <a:cs typeface="Clear Sans Bold"/>
+                <a:sym typeface="Clear Sans Bold"/>
+              </a:rPr>
+              <a:t> bounding box </a:t>
+            </a:r>
+            <a:r>
+              <a:rPr lang="en-US" sz="2000" b="1" dirty="0" err="1">
+                <a:solidFill>
+                  <a:srgbClr val="14274E"/>
+                </a:solidFill>
+                <a:latin typeface="Clear Sans Bold"/>
+                <a:ea typeface="Clear Sans Bold"/>
+                <a:cs typeface="Clear Sans Bold"/>
+                <a:sym typeface="Clear Sans Bold"/>
+              </a:rPr>
+              <a:t>của</a:t>
+            </a:r>
+            <a:r>
+              <a:rPr lang="en-US" sz="2000" b="1" dirty="0">
+                <a:solidFill>
+                  <a:srgbClr val="14274E"/>
+                </a:solidFill>
+                <a:latin typeface="Clear Sans Bold"/>
+                <a:ea typeface="Clear Sans Bold"/>
+                <a:cs typeface="Clear Sans Bold"/>
+                <a:sym typeface="Clear Sans Bold"/>
+              </a:rPr>
+              <a:t> </a:t>
+            </a:r>
+            <a:r>
+              <a:rPr lang="en-US" sz="2000" b="1" dirty="0" err="1">
+                <a:solidFill>
+                  <a:srgbClr val="14274E"/>
+                </a:solidFill>
+                <a:latin typeface="Clear Sans Bold"/>
+                <a:ea typeface="Clear Sans Bold"/>
+                <a:cs typeface="Clear Sans Bold"/>
+                <a:sym typeface="Clear Sans Bold"/>
+              </a:rPr>
+              <a:t>phương</a:t>
+            </a:r>
+            <a:r>
+              <a:rPr lang="en-US" sz="2000" b="1" dirty="0">
+                <a:solidFill>
+                  <a:srgbClr val="14274E"/>
+                </a:solidFill>
+                <a:latin typeface="Clear Sans Bold"/>
+                <a:ea typeface="Clear Sans Bold"/>
+                <a:cs typeface="Clear Sans Bold"/>
+                <a:sym typeface="Clear Sans Bold"/>
+              </a:rPr>
+              <a:t> </a:t>
+            </a:r>
+            <a:r>
+              <a:rPr lang="en-US" sz="2000" b="1" dirty="0" err="1">
+                <a:solidFill>
+                  <a:srgbClr val="14274E"/>
+                </a:solidFill>
+                <a:latin typeface="Clear Sans Bold"/>
+                <a:ea typeface="Clear Sans Bold"/>
+                <a:cs typeface="Clear Sans Bold"/>
+                <a:sym typeface="Clear Sans Bold"/>
+              </a:rPr>
+              <a:t>tiện</a:t>
+            </a:r>
+            <a:r>
+              <a:rPr lang="en-US" sz="2000" b="1" dirty="0">
+                <a:solidFill>
+                  <a:srgbClr val="14274E"/>
+                </a:solidFill>
+                <a:latin typeface="Clear Sans Bold"/>
+                <a:ea typeface="Clear Sans Bold"/>
+                <a:cs typeface="Clear Sans Bold"/>
+                <a:sym typeface="Clear Sans Bold"/>
+              </a:rPr>
+              <a:t> </a:t>
+            </a:r>
+            <a:r>
+              <a:rPr lang="en-US" sz="2000" b="1" dirty="0" err="1">
+                <a:solidFill>
+                  <a:srgbClr val="14274E"/>
+                </a:solidFill>
+                <a:latin typeface="Clear Sans Bold"/>
+                <a:ea typeface="Clear Sans Bold"/>
+                <a:cs typeface="Clear Sans Bold"/>
+                <a:sym typeface="Clear Sans Bold"/>
+              </a:rPr>
+              <a:t>đang</a:t>
+            </a:r>
+            <a:r>
+              <a:rPr lang="en-US" sz="2000" b="1" dirty="0">
+                <a:solidFill>
+                  <a:srgbClr val="14274E"/>
+                </a:solidFill>
+                <a:latin typeface="Clear Sans Bold"/>
+                <a:ea typeface="Clear Sans Bold"/>
+                <a:cs typeface="Clear Sans Bold"/>
+                <a:sym typeface="Clear Sans Bold"/>
+              </a:rPr>
+              <a:t> </a:t>
+            </a:r>
+            <a:r>
+              <a:rPr lang="en-US" sz="2000" b="1" dirty="0" err="1">
+                <a:solidFill>
+                  <a:srgbClr val="14274E"/>
+                </a:solidFill>
+                <a:latin typeface="Clear Sans Bold"/>
+                <a:ea typeface="Clear Sans Bold"/>
+                <a:cs typeface="Clear Sans Bold"/>
+                <a:sym typeface="Clear Sans Bold"/>
+              </a:rPr>
+              <a:t>được</a:t>
+            </a:r>
+            <a:r>
+              <a:rPr lang="en-US" sz="2000" b="1" dirty="0">
+                <a:solidFill>
+                  <a:srgbClr val="14274E"/>
+                </a:solidFill>
+                <a:latin typeface="Clear Sans Bold"/>
+                <a:ea typeface="Clear Sans Bold"/>
+                <a:cs typeface="Clear Sans Bold"/>
+                <a:sym typeface="Clear Sans Bold"/>
+              </a:rPr>
+              <a:t> track.</a:t>
             </a:r>
           </a:p>
           <a:p>
@@ -5297,16 +7455,112 @@
               <a:buAutoNum type="arabicPeriod"/>
             </a:pPr>
             <a:r>
-              <a:rPr lang="en-US" sz="2000" b="1">
-                <a:solidFill>
-                  <a:srgbClr val="14274E"/>
-                </a:solidFill>
-                <a:latin typeface="Clear Sans Bold"/>
-                <a:ea typeface="Clear Sans Bold"/>
-                <a:cs typeface="Clear Sans Bold"/>
-                <a:sym typeface="Clear Sans Bold"/>
-              </a:rPr>
-              <a:t>Lưu kết quả &amp; hiển thị:</a:t>
+              <a:rPr lang="en-US" sz="2000" b="1" dirty="0">
+                <a:solidFill>
+                  <a:srgbClr val="14274E"/>
+                </a:solidFill>
+                <a:latin typeface="Clear Sans Bold"/>
+                <a:ea typeface="Clear Sans Bold"/>
+                <a:cs typeface="Clear Sans Bold"/>
+                <a:sym typeface="Clear Sans Bold"/>
+              </a:rPr>
+              <a:t>Lưu </a:t>
+            </a:r>
+            <a:r>
+              <a:rPr lang="en-US" sz="2000" b="1" dirty="0" err="1">
+                <a:solidFill>
+                  <a:srgbClr val="14274E"/>
+                </a:solidFill>
+                <a:latin typeface="Clear Sans Bold"/>
+                <a:ea typeface="Clear Sans Bold"/>
+                <a:cs typeface="Clear Sans Bold"/>
+                <a:sym typeface="Clear Sans Bold"/>
+              </a:rPr>
+              <a:t>kết</a:t>
+            </a:r>
+            <a:r>
+              <a:rPr lang="en-US" sz="2000" b="1" dirty="0">
+                <a:solidFill>
+                  <a:srgbClr val="14274E"/>
+                </a:solidFill>
+                <a:latin typeface="Clear Sans Bold"/>
+                <a:ea typeface="Clear Sans Bold"/>
+                <a:cs typeface="Clear Sans Bold"/>
+                <a:sym typeface="Clear Sans Bold"/>
+              </a:rPr>
+              <a:t> </a:t>
+            </a:r>
+            <a:r>
+              <a:rPr lang="en-US" sz="2000" b="1" dirty="0" err="1">
+                <a:solidFill>
+                  <a:srgbClr val="14274E"/>
+                </a:solidFill>
+                <a:latin typeface="Clear Sans Bold"/>
+                <a:ea typeface="Clear Sans Bold"/>
+                <a:cs typeface="Clear Sans Bold"/>
+                <a:sym typeface="Clear Sans Bold"/>
+              </a:rPr>
+              <a:t>quả</a:t>
+            </a:r>
+            <a:r>
+              <a:rPr lang="en-US" sz="2000" b="1" dirty="0">
+                <a:solidFill>
+                  <a:srgbClr val="14274E"/>
+                </a:solidFill>
+                <a:latin typeface="Clear Sans Bold"/>
+                <a:ea typeface="Clear Sans Bold"/>
+                <a:cs typeface="Clear Sans Bold"/>
+                <a:sym typeface="Clear Sans Bold"/>
+              </a:rPr>
+              <a:t> &amp; </a:t>
+            </a:r>
+            <a:r>
+              <a:rPr lang="en-US" sz="2000" b="1" dirty="0" err="1">
+                <a:solidFill>
+                  <a:srgbClr val="14274E"/>
+                </a:solidFill>
+                <a:latin typeface="Clear Sans Bold"/>
+                <a:ea typeface="Clear Sans Bold"/>
+                <a:cs typeface="Clear Sans Bold"/>
+                <a:sym typeface="Clear Sans Bold"/>
+              </a:rPr>
+              <a:t>hiển</a:t>
+            </a:r>
+            <a:r>
+              <a:rPr lang="en-US" sz="2000" b="1" dirty="0">
+                <a:solidFill>
+                  <a:srgbClr val="14274E"/>
+                </a:solidFill>
+                <a:latin typeface="Clear Sans Bold"/>
+                <a:ea typeface="Clear Sans Bold"/>
+                <a:cs typeface="Clear Sans Bold"/>
+                <a:sym typeface="Clear Sans Bold"/>
+              </a:rPr>
+              <a:t> </a:t>
+            </a:r>
+            <a:r>
+              <a:rPr lang="en-US" sz="2000" b="1" dirty="0" err="1">
+                <a:solidFill>
+                  <a:srgbClr val="14274E"/>
+                </a:solidFill>
+                <a:latin typeface="Clear Sans Bold"/>
+                <a:ea typeface="Clear Sans Bold"/>
+                <a:cs typeface="Clear Sans Bold"/>
+                <a:sym typeface="Clear Sans Bold"/>
+              </a:rPr>
+              <a:t>thị</a:t>
+            </a:r>
+            <a:r>
+              <a:rPr lang="en-US" sz="2000" b="1" dirty="0">
+                <a:solidFill>
+                  <a:srgbClr val="14274E"/>
+                </a:solidFill>
+                <a:latin typeface="Clear Sans Bold"/>
+                <a:ea typeface="Clear Sans Bold"/>
+                <a:cs typeface="Clear Sans Bold"/>
+                <a:sym typeface="Clear Sans Bold"/>
+              </a:rPr>
+              <a:t>:</a:t>
             </a:r>
           </a:p>
           <a:p>
@@ -5318,16 +7572,136 @@
               <a:buChar char="⚬"/>
             </a:pPr>
             <a:r>
-              <a:rPr lang="en-US" sz="2000" b="1">
-                <a:solidFill>
-                  <a:srgbClr val="14274E"/>
-                </a:solidFill>
-                <a:latin typeface="Clear Sans Bold"/>
-                <a:ea typeface="Clear Sans Bold"/>
-                <a:cs typeface="Clear Sans Bold"/>
-                <a:sym typeface="Clear Sans Bold"/>
-              </a:rPr>
-              <a:t>In thông tin biển số theo ID xe.</a:t>
+              <a:rPr lang="en-US" sz="2000" b="1" dirty="0">
+                <a:solidFill>
+                  <a:srgbClr val="14274E"/>
+                </a:solidFill>
+                <a:latin typeface="Clear Sans Bold"/>
+                <a:ea typeface="Clear Sans Bold"/>
+                <a:cs typeface="Clear Sans Bold"/>
+                <a:sym typeface="Clear Sans Bold"/>
+              </a:rPr>
+              <a:t>In </a:t>
+            </a:r>
+            <a:r>
+              <a:rPr lang="en-US" sz="2000" b="1" dirty="0" err="1">
+                <a:solidFill>
+                  <a:srgbClr val="14274E"/>
+                </a:solidFill>
+                <a:latin typeface="Clear Sans Bold"/>
+                <a:ea typeface="Clear Sans Bold"/>
+                <a:cs typeface="Clear Sans Bold"/>
+                <a:sym typeface="Clear Sans Bold"/>
+              </a:rPr>
+              <a:t>thông</a:t>
+            </a:r>
+            <a:r>
+              <a:rPr lang="en-US" sz="2000" b="1" dirty="0">
+                <a:solidFill>
+                  <a:srgbClr val="14274E"/>
+                </a:solidFill>
+                <a:latin typeface="Clear Sans Bold"/>
+                <a:ea typeface="Clear Sans Bold"/>
+                <a:cs typeface="Clear Sans Bold"/>
+                <a:sym typeface="Clear Sans Bold"/>
+              </a:rPr>
+              <a:t> tin </a:t>
+            </a:r>
+            <a:r>
+              <a:rPr lang="en-US" sz="2000" b="1" dirty="0" err="1">
+                <a:solidFill>
+                  <a:srgbClr val="14274E"/>
+                </a:solidFill>
+                <a:latin typeface="Clear Sans Bold"/>
+                <a:ea typeface="Clear Sans Bold"/>
+                <a:cs typeface="Clear Sans Bold"/>
+                <a:sym typeface="Clear Sans Bold"/>
+              </a:rPr>
+              <a:t>biển</a:t>
+            </a:r>
+            <a:r>
+              <a:rPr lang="en-US" sz="2000" b="1" dirty="0">
+                <a:solidFill>
+                  <a:srgbClr val="14274E"/>
+                </a:solidFill>
+                <a:latin typeface="Clear Sans Bold"/>
+                <a:ea typeface="Clear Sans Bold"/>
+                <a:cs typeface="Clear Sans Bold"/>
+                <a:sym typeface="Clear Sans Bold"/>
+              </a:rPr>
+              <a:t> </a:t>
+            </a:r>
+            <a:r>
+              <a:rPr lang="en-US" sz="2000" b="1" dirty="0" err="1">
+                <a:solidFill>
+                  <a:srgbClr val="14274E"/>
+                </a:solidFill>
+                <a:latin typeface="Clear Sans Bold"/>
+                <a:ea typeface="Clear Sans Bold"/>
+                <a:cs typeface="Clear Sans Bold"/>
+                <a:sym typeface="Clear Sans Bold"/>
+              </a:rPr>
+              <a:t>số</a:t>
+            </a:r>
+            <a:r>
+              <a:rPr lang="en-US" sz="2000" b="1" dirty="0">
+                <a:solidFill>
+                  <a:srgbClr val="14274E"/>
+                </a:solidFill>
+                <a:latin typeface="Clear Sans Bold"/>
+                <a:ea typeface="Clear Sans Bold"/>
+                <a:cs typeface="Clear Sans Bold"/>
+                <a:sym typeface="Clear Sans Bold"/>
+              </a:rPr>
+              <a:t> </a:t>
+            </a:r>
+            <a:r>
+              <a:rPr lang="en-US" sz="2000" b="1" dirty="0" err="1">
+                <a:solidFill>
+                  <a:srgbClr val="14274E"/>
+                </a:solidFill>
+                <a:latin typeface="Clear Sans Bold"/>
+                <a:ea typeface="Clear Sans Bold"/>
+                <a:cs typeface="Clear Sans Bold"/>
+                <a:sym typeface="Clear Sans Bold"/>
+              </a:rPr>
+              <a:t>theo</a:t>
+            </a:r>
+            <a:r>
+              <a:rPr lang="en-US" sz="2000" b="1" dirty="0">
+                <a:solidFill>
+                  <a:srgbClr val="14274E"/>
+                </a:solidFill>
+                <a:latin typeface="Clear Sans Bold"/>
+                <a:ea typeface="Clear Sans Bold"/>
+                <a:cs typeface="Clear Sans Bold"/>
+                <a:sym typeface="Clear Sans Bold"/>
+              </a:rPr>
+              <a:t> ID </a:t>
+            </a:r>
+            <a:r>
+              <a:rPr lang="en-US" sz="2000" b="1" dirty="0" err="1">
+                <a:solidFill>
+                  <a:srgbClr val="14274E"/>
+                </a:solidFill>
+                <a:latin typeface="Clear Sans Bold"/>
+                <a:ea typeface="Clear Sans Bold"/>
+                <a:cs typeface="Clear Sans Bold"/>
+                <a:sym typeface="Clear Sans Bold"/>
+              </a:rPr>
+              <a:t>xe</a:t>
+            </a:r>
+            <a:r>
+              <a:rPr lang="en-US" sz="2000" b="1" dirty="0">
+                <a:solidFill>
+                  <a:srgbClr val="14274E"/>
+                </a:solidFill>
+                <a:latin typeface="Clear Sans Bold"/>
+                <a:ea typeface="Clear Sans Bold"/>
+                <a:cs typeface="Clear Sans Bold"/>
+                <a:sym typeface="Clear Sans Bold"/>
+              </a:rPr>
+              <a:t>.</a:t>
             </a:r>
           </a:p>
           <a:p>
@@ -5339,16 +7713,220 @@
               <a:buChar char="⚬"/>
             </a:pPr>
             <a:r>
-              <a:rPr lang="en-US" sz="2000" b="1">
-                <a:solidFill>
-                  <a:srgbClr val="14274E"/>
-                </a:solidFill>
-                <a:latin typeface="Clear Sans Bold"/>
-                <a:ea typeface="Clear Sans Bold"/>
-                <a:cs typeface="Clear Sans Bold"/>
-                <a:sym typeface="Clear Sans Bold"/>
-              </a:rPr>
-              <a:t>Ghi khung hình đã nhận diện vào video mới output_processed_video.avi.</a:t>
+              <a:rPr lang="en-US" sz="2000" b="1" dirty="0" err="1">
+                <a:solidFill>
+                  <a:srgbClr val="14274E"/>
+                </a:solidFill>
+                <a:latin typeface="Clear Sans Bold"/>
+                <a:ea typeface="Clear Sans Bold"/>
+                <a:cs typeface="Clear Sans Bold"/>
+                <a:sym typeface="Clear Sans Bold"/>
+              </a:rPr>
+              <a:t>Ghi</a:t>
+            </a:r>
+            <a:r>
+              <a:rPr lang="en-US" sz="2000" b="1" dirty="0">
+                <a:solidFill>
+                  <a:srgbClr val="14274E"/>
+                </a:solidFill>
+                <a:latin typeface="Clear Sans Bold"/>
+                <a:ea typeface="Clear Sans Bold"/>
+                <a:cs typeface="Clear Sans Bold"/>
+                <a:sym typeface="Clear Sans Bold"/>
+              </a:rPr>
+              <a:t> </a:t>
+            </a:r>
+            <a:r>
+              <a:rPr lang="en-US" sz="2000" b="1" dirty="0" err="1">
+                <a:solidFill>
+                  <a:srgbClr val="14274E"/>
+                </a:solidFill>
+                <a:latin typeface="Clear Sans Bold"/>
+                <a:ea typeface="Clear Sans Bold"/>
+                <a:cs typeface="Clear Sans Bold"/>
+                <a:sym typeface="Clear Sans Bold"/>
+              </a:rPr>
+              <a:t>khung</a:t>
+            </a:r>
+            <a:r>
+              <a:rPr lang="en-US" sz="2000" b="1" dirty="0">
+                <a:solidFill>
+                  <a:srgbClr val="14274E"/>
+                </a:solidFill>
+                <a:latin typeface="Clear Sans Bold"/>
+                <a:ea typeface="Clear Sans Bold"/>
+                <a:cs typeface="Clear Sans Bold"/>
+                <a:sym typeface="Clear Sans Bold"/>
+              </a:rPr>
+              <a:t> </a:t>
+            </a:r>
+            <a:r>
+              <a:rPr lang="en-US" sz="2000" b="1" dirty="0" err="1">
+                <a:solidFill>
+                  <a:srgbClr val="14274E"/>
+                </a:solidFill>
+                <a:latin typeface="Clear Sans Bold"/>
+                <a:ea typeface="Clear Sans Bold"/>
+                <a:cs typeface="Clear Sans Bold"/>
+                <a:sym typeface="Clear Sans Bold"/>
+              </a:rPr>
+              <a:t>hình</a:t>
+            </a:r>
+            <a:r>
+              <a:rPr lang="en-US" sz="2000" b="1" dirty="0">
+                <a:solidFill>
+                  <a:srgbClr val="14274E"/>
+                </a:solidFill>
+                <a:latin typeface="Clear Sans Bold"/>
+                <a:ea typeface="Clear Sans Bold"/>
+                <a:cs typeface="Clear Sans Bold"/>
+                <a:sym typeface="Clear Sans Bold"/>
+              </a:rPr>
+              <a:t> </a:t>
+            </a:r>
+            <a:r>
+              <a:rPr lang="en-US" sz="2000" b="1" dirty="0" err="1">
+                <a:solidFill>
+                  <a:srgbClr val="14274E"/>
+                </a:solidFill>
+                <a:latin typeface="Clear Sans Bold"/>
+                <a:ea typeface="Clear Sans Bold"/>
+                <a:cs typeface="Clear Sans Bold"/>
+                <a:sym typeface="Clear Sans Bold"/>
+              </a:rPr>
+              <a:t>đã</a:t>
+            </a:r>
+            <a:r>
+              <a:rPr lang="en-US" sz="2000" b="1" dirty="0">
+                <a:solidFill>
+                  <a:srgbClr val="14274E"/>
+                </a:solidFill>
+                <a:latin typeface="Clear Sans Bold"/>
+                <a:ea typeface="Clear Sans Bold"/>
+                <a:cs typeface="Clear Sans Bold"/>
+                <a:sym typeface="Clear Sans Bold"/>
+              </a:rPr>
+              <a:t> </a:t>
+            </a:r>
+            <a:r>
+              <a:rPr lang="en-US" sz="2000" b="1" dirty="0" err="1">
+                <a:solidFill>
+                  <a:srgbClr val="14274E"/>
+                </a:solidFill>
+                <a:latin typeface="Clear Sans Bold"/>
+                <a:ea typeface="Clear Sans Bold"/>
+                <a:cs typeface="Clear Sans Bold"/>
+                <a:sym typeface="Clear Sans Bold"/>
+              </a:rPr>
+              <a:t>nhận</a:t>
+            </a:r>
+            <a:r>
+              <a:rPr lang="en-US" sz="2000" b="1" dirty="0">
+                <a:solidFill>
+                  <a:srgbClr val="14274E"/>
+                </a:solidFill>
+                <a:latin typeface="Clear Sans Bold"/>
+                <a:ea typeface="Clear Sans Bold"/>
+                <a:cs typeface="Clear Sans Bold"/>
+                <a:sym typeface="Clear Sans Bold"/>
+              </a:rPr>
+              <a:t> </a:t>
+            </a:r>
+            <a:r>
+              <a:rPr lang="en-US" sz="2000" b="1" dirty="0" err="1">
+                <a:solidFill>
+                  <a:srgbClr val="14274E"/>
+                </a:solidFill>
+                <a:latin typeface="Clear Sans Bold"/>
+                <a:ea typeface="Clear Sans Bold"/>
+                <a:cs typeface="Clear Sans Bold"/>
+                <a:sym typeface="Clear Sans Bold"/>
+              </a:rPr>
+              <a:t>diện</a:t>
+            </a:r>
+            <a:r>
+              <a:rPr lang="en-US" sz="2000" b="1" dirty="0">
+                <a:solidFill>
+                  <a:srgbClr val="14274E"/>
+                </a:solidFill>
+                <a:latin typeface="Clear Sans Bold"/>
+                <a:ea typeface="Clear Sans Bold"/>
+                <a:cs typeface="Clear Sans Bold"/>
+                <a:sym typeface="Clear Sans Bold"/>
+              </a:rPr>
+              <a:t> </a:t>
+            </a:r>
+            <a:r>
+              <a:rPr lang="en-US" sz="2000" b="1" dirty="0" err="1">
+                <a:solidFill>
+                  <a:srgbClr val="14274E"/>
+                </a:solidFill>
+                <a:latin typeface="Clear Sans Bold"/>
+                <a:ea typeface="Clear Sans Bold"/>
+                <a:cs typeface="Clear Sans Bold"/>
+                <a:sym typeface="Clear Sans Bold"/>
+              </a:rPr>
+              <a:t>vào</a:t>
+            </a:r>
+            <a:r>
+              <a:rPr lang="en-US" sz="2000" b="1" dirty="0">
+                <a:solidFill>
+                  <a:srgbClr val="14274E"/>
+                </a:solidFill>
+                <a:latin typeface="Clear Sans Bold"/>
+                <a:ea typeface="Clear Sans Bold"/>
+                <a:cs typeface="Clear Sans Bold"/>
+                <a:sym typeface="Clear Sans Bold"/>
+              </a:rPr>
+              <a:t> video </a:t>
+            </a:r>
+            <a:r>
+              <a:rPr lang="en-US" sz="2000" b="1" dirty="0" err="1">
+                <a:solidFill>
+                  <a:srgbClr val="14274E"/>
+                </a:solidFill>
+                <a:latin typeface="Clear Sans Bold"/>
+                <a:ea typeface="Clear Sans Bold"/>
+                <a:cs typeface="Clear Sans Bold"/>
+                <a:sym typeface="Clear Sans Bold"/>
+              </a:rPr>
+              <a:t>mới</a:t>
+            </a:r>
+            <a:r>
+              <a:rPr lang="en-US" sz="2000" b="1" dirty="0">
+                <a:solidFill>
+                  <a:srgbClr val="14274E"/>
+                </a:solidFill>
+                <a:latin typeface="Clear Sans Bold"/>
+                <a:ea typeface="Clear Sans Bold"/>
+                <a:cs typeface="Clear Sans Bold"/>
+                <a:sym typeface="Clear Sans Bold"/>
+              </a:rPr>
+              <a:t> </a:t>
+            </a:r>
+            <a:r>
+              <a:rPr lang="en-US" sz="2000" b="1" dirty="0" err="1">
+                <a:solidFill>
+                  <a:srgbClr val="14274E"/>
+                </a:solidFill>
+                <a:latin typeface="Clear Sans Bold"/>
+                <a:ea typeface="Clear Sans Bold"/>
+                <a:cs typeface="Clear Sans Bold"/>
+                <a:sym typeface="Clear Sans Bold"/>
+              </a:rPr>
+              <a:t>output_scaled.avi</a:t>
+            </a:r>
+            <a:r>
+              <a:rPr lang="en-US" sz="2000" b="1" dirty="0">
+                <a:solidFill>
+                  <a:srgbClr val="14274E"/>
+                </a:solidFill>
+                <a:latin typeface="Clear Sans Bold"/>
+                <a:ea typeface="Clear Sans Bold"/>
+                <a:cs typeface="Clear Sans Bold"/>
+                <a:sym typeface="Clear Sans Bold"/>
+              </a:rPr>
+              <a:t>.</a:t>
             </a:r>
           </a:p>
           <a:p>
@@ -5357,7 +7935,7 @@
                 <a:spcPts val="2800"/>
               </a:lnSpc>
             </a:pPr>
-            <a:endParaRPr lang="en-US" sz="2000" b="1">
+            <a:endParaRPr lang="en-US" sz="2000" b="1" dirty="0">
               <a:solidFill>
                 <a:srgbClr val="14274E"/>
               </a:solidFill>
@@ -8646,7 +11224,7 @@
               </a:spcBef>
             </a:pPr>
             <a:r>
-              <a:rPr lang="en-US" sz="3300">
+              <a:rPr lang="en-US" sz="3300" dirty="0">
                 <a:solidFill>
                   <a:srgbClr val="14274E"/>
                 </a:solidFill>
@@ -8655,7 +11233,31 @@
                 <a:cs typeface="Open Sans"/>
                 <a:sym typeface="Open Sans"/>
               </a:rPr>
-              <a:t>·Visual Stadio Code</a:t>
+              <a:t>·Visual </a:t>
+            </a:r>
+            <a:r>
+              <a:rPr lang="en-US" sz="3300" dirty="0" err="1">
+                <a:solidFill>
+                  <a:srgbClr val="14274E"/>
+                </a:solidFill>
+                <a:latin typeface="Open Sans"/>
+                <a:ea typeface="Open Sans"/>
+                <a:cs typeface="Open Sans"/>
+                <a:sym typeface="Open Sans"/>
+              </a:rPr>
+              <a:t>Stadio</a:t>
+            </a:r>
+            <a:r>
+              <a:rPr lang="en-US" sz="3300" dirty="0">
+                <a:solidFill>
+                  <a:srgbClr val="14274E"/>
+                </a:solidFill>
+                <a:latin typeface="Open Sans"/>
+                <a:ea typeface="Open Sans"/>
+                <a:cs typeface="Open Sans"/>
+                <a:sym typeface="Open Sans"/>
+              </a:rPr>
+              <a:t> Code</a:t>
             </a:r>
           </a:p>
           <a:p>
@@ -8668,7 +11270,7 @@
               </a:spcBef>
             </a:pPr>
             <a:r>
-              <a:rPr lang="en-US" sz="3300">
+              <a:rPr lang="en-US" sz="3300" dirty="0">
                 <a:solidFill>
                   <a:srgbClr val="14274E"/>
                 </a:solidFill>
@@ -8690,7 +11292,7 @@
               </a:spcBef>
             </a:pPr>
             <a:r>
-              <a:rPr lang="en-US" sz="3300">
+              <a:rPr lang="en-US" sz="3300" dirty="0">
                 <a:solidFill>
                   <a:srgbClr val="14274E"/>
                 </a:solidFill>
@@ -8712,7 +11314,7 @@
               </a:spcBef>
             </a:pPr>
             <a:r>
-              <a:rPr lang="en-US" sz="3300">
+              <a:rPr lang="en-US" sz="3300" dirty="0">
                 <a:solidFill>
                   <a:srgbClr val="14274E"/>
                 </a:solidFill>
@@ -8721,8 +11323,77 @@
                 <a:cs typeface="Open Sans"/>
                 <a:sym typeface="Open Sans"/>
               </a:rPr>
-              <a:t>·Mô hình YOLOv8</a:t>
-            </a:r>
+              <a:t>·</a:t>
+            </a:r>
+            <a:r>
+              <a:rPr lang="en-US" sz="3300" dirty="0" err="1">
+                <a:solidFill>
+                  <a:srgbClr val="14274E"/>
+                </a:solidFill>
+                <a:latin typeface="Open Sans"/>
+                <a:ea typeface="Open Sans"/>
+                <a:cs typeface="Open Sans"/>
+                <a:sym typeface="Open Sans"/>
+              </a:rPr>
+              <a:t>Mô</a:t>
+            </a:r>
+            <a:r>
+              <a:rPr lang="en-US" sz="3300" dirty="0">
+                <a:solidFill>
+                  <a:srgbClr val="14274E"/>
+                </a:solidFill>
+                <a:latin typeface="Open Sans"/>
+                <a:ea typeface="Open Sans"/>
+                <a:cs typeface="Open Sans"/>
+                <a:sym typeface="Open Sans"/>
+              </a:rPr>
+              <a:t> </a:t>
+            </a:r>
+            <a:r>
+              <a:rPr lang="en-US" sz="3300" dirty="0" err="1">
+                <a:solidFill>
+                  <a:srgbClr val="14274E"/>
+                </a:solidFill>
+                <a:latin typeface="Open Sans"/>
+                <a:ea typeface="Open Sans"/>
+                <a:cs typeface="Open Sans"/>
+                <a:sym typeface="Open Sans"/>
+              </a:rPr>
+              <a:t>hình</a:t>
+            </a:r>
+            <a:r>
+              <a:rPr lang="en-US" sz="3300" dirty="0">
+                <a:solidFill>
+                  <a:srgbClr val="14274E"/>
+                </a:solidFill>
+                <a:latin typeface="Open Sans"/>
+                <a:ea typeface="Open Sans"/>
+                <a:cs typeface="Open Sans"/>
+                <a:sym typeface="Open Sans"/>
+              </a:rPr>
+              <a:t> </a:t>
+            </a:r>
+            <a:r>
+              <a:rPr lang="en-US" sz="3300" dirty="0" err="1">
+                <a:solidFill>
+                  <a:srgbClr val="14274E"/>
+                </a:solidFill>
+                <a:latin typeface="Open Sans"/>
+                <a:ea typeface="Open Sans"/>
+                <a:cs typeface="Open Sans"/>
+                <a:sym typeface="Open Sans"/>
+              </a:rPr>
+              <a:t>YOLOv8</a:t>
+            </a:r>
+            <a:endParaRPr lang="en-US" sz="3300" dirty="0">
+              <a:solidFill>
+                <a:srgbClr val="14274E"/>
+              </a:solidFill>
+              <a:latin typeface="Open Sans"/>
+              <a:ea typeface="Open Sans"/>
+              <a:cs typeface="Open Sans"/>
+              <a:sym typeface="Open Sans"/>
+            </a:endParaRPr>
           </a:p>
           <a:p>
             <a:pPr algn="l">
@@ -8734,7 +11405,7 @@
               </a:spcBef>
             </a:pPr>
             <a:r>
-              <a:rPr lang="en-US" sz="3300">
+              <a:rPr lang="en-US" sz="3300" dirty="0">
                 <a:solidFill>
                   <a:srgbClr val="14274E"/>
                 </a:solidFill>
@@ -8743,8 +11414,29 @@
                 <a:cs typeface="Open Sans"/>
                 <a:sym typeface="Open Sans"/>
               </a:rPr>
-              <a:t>·ByteTrack</a:t>
-            </a:r>
+              <a:t>·</a:t>
+            </a:r>
+            <a:r>
+              <a:rPr lang="en-US" sz="3300" dirty="0" err="1">
+                <a:solidFill>
+                  <a:srgbClr val="14274E"/>
+                </a:solidFill>
+                <a:latin typeface="Open Sans"/>
+                <a:ea typeface="Open Sans"/>
+                <a:cs typeface="Open Sans"/>
+                <a:sym typeface="Open Sans"/>
+              </a:rPr>
+              <a:t>ByteTrack</a:t>
+            </a:r>
+            <a:endParaRPr lang="en-US" sz="3300" dirty="0">
+              <a:solidFill>
+                <a:srgbClr val="14274E"/>
+              </a:solidFill>
+              <a:latin typeface="Open Sans"/>
+              <a:ea typeface="Open Sans"/>
+              <a:cs typeface="Open Sans"/>
+              <a:sym typeface="Open Sans"/>
+            </a:endParaRPr>
           </a:p>
           <a:p>
             <a:pPr algn="ctr">
@@ -8755,7 +11447,7 @@
                 <a:spcPct val="0"/>
               </a:spcBef>
             </a:pPr>
-            <a:endParaRPr lang="en-US" sz="3300">
+            <a:endParaRPr lang="en-US" sz="3300" dirty="0">
               <a:solidFill>
                 <a:srgbClr val="14274E"/>
               </a:solidFill>
@@ -9748,11 +12440,17 @@
           <p:cNvGraphicFramePr>
             <a:graphicFrameLocks noGrp="1"/>
           </p:cNvGraphicFramePr>
-          <p:nvPr/>
+          <p:nvPr>
+            <p:extLst>
+              <p:ext uri="{D42A27DB-BD31-4B8C-83A1-F6EECF244321}">
+                <p14:modId xmlns:p14="http://schemas.microsoft.com/office/powerpoint/2010/main" val="399598062"/>
+              </p:ext>
+            </p:extLst>
+          </p:nvPr>
         </p:nvGraphicFramePr>
         <p:xfrm>
           <a:off x="1828879" y="3600609"/>
-          <a:ext cx="14630241" cy="4333875"/>
+          <a:ext cx="14630241" cy="4461847"/>
         </p:xfrm>
         <a:graphic>
           <a:graphicData uri="http://schemas.openxmlformats.org/drawingml/2006/table">
@@ -9794,7 +12492,7 @@
                         <a:defRPr/>
                       </a:pPr>
                       <a:r>
-                        <a:rPr lang="en-US" sz="1899">
+                        <a:rPr lang="en-US" sz="3600" b="1" dirty="0" err="1">
                           <a:solidFill>
                             <a:srgbClr val="000000"/>
                           </a:solidFill>
@@ -9803,9 +12501,33 @@
                           <a:cs typeface="Clear Sans"/>
                           <a:sym typeface="Clear Sans"/>
                         </a:rPr>
-                        <a:t>Tiêu chí</a:t>
+                        <a:t>Tiêu</a:t>
                       </a:r>
-                      <a:endParaRPr lang="en-US" sz="1100"/>
+                      <a:r>
+                        <a:rPr lang="en-US" sz="3600" b="1" dirty="0">
+                          <a:solidFill>
+                            <a:srgbClr val="000000"/>
+                          </a:solidFill>
+                          <a:latin typeface="Clear Sans"/>
+                          <a:ea typeface="Clear Sans"/>
+                          <a:cs typeface="Clear Sans"/>
+                          <a:sym typeface="Clear Sans"/>
+                        </a:rPr>
+                        <a:t> </a:t>
+                      </a:r>
+                      <a:r>
+                        <a:rPr lang="en-US" sz="3600" b="1" dirty="0" err="1">
+                          <a:solidFill>
+                            <a:srgbClr val="000000"/>
+                          </a:solidFill>
+                          <a:latin typeface="Clear Sans"/>
+                          <a:ea typeface="Clear Sans"/>
+                          <a:cs typeface="Clear Sans"/>
+                          <a:sym typeface="Clear Sans"/>
+                        </a:rPr>
+                        <a:t>chí</a:t>
+                      </a:r>
+                      <a:endParaRPr lang="en-US" sz="3600" b="1" dirty="0"/>
                     </a:p>
                   </a:txBody>
                   <a:tcPr marL="190500" marR="190500" marT="190500" marB="190500" anchor="ctr">
@@ -9859,7 +12581,7 @@
                         <a:defRPr/>
                       </a:pPr>
                       <a:r>
-                        <a:rPr lang="en-US" sz="3300">
+                        <a:rPr lang="en-US" sz="3600" dirty="0" err="1">
                           <a:solidFill>
                             <a:srgbClr val="000000"/>
                           </a:solidFill>
@@ -9870,7 +12592,7 @@
                         </a:rPr>
                         <a:t>YOLOv5</a:t>
                       </a:r>
-                      <a:endParaRPr lang="en-US" sz="1100"/>
+                      <a:endParaRPr lang="en-US" sz="1200" dirty="0"/>
                     </a:p>
                   </a:txBody>
                   <a:tcPr marL="190500" marR="190500" marT="190500" marB="190500" anchor="ctr">
@@ -9924,7 +12646,7 @@
                         <a:defRPr/>
                       </a:pPr>
                       <a:r>
-                        <a:rPr lang="en-US" sz="3300">
+                        <a:rPr lang="en-US" sz="3600">
                           <a:solidFill>
                             <a:srgbClr val="000000"/>
                           </a:solidFill>
@@ -9935,7 +12657,7 @@
                         </a:rPr>
                         <a:t>YOLOv8</a:t>
                       </a:r>
-                      <a:endParaRPr lang="en-US" sz="1100"/>
+                      <a:endParaRPr lang="en-US" sz="1200"/>
                     </a:p>
                   </a:txBody>
                   <a:tcPr marL="190500" marR="190500" marT="190500" marB="190500" anchor="ctr">
@@ -9996,7 +12718,7 @@
                         <a:defRPr/>
                       </a:pPr>
                       <a:r>
-                        <a:rPr lang="en-US" sz="2000">
+                        <a:rPr lang="en-US" sz="2400" b="1" dirty="0" err="1">
                           <a:solidFill>
                             <a:srgbClr val="000000"/>
                           </a:solidFill>
@@ -10005,9 +12727,57 @@
                           <a:cs typeface="Clear Sans"/>
                           <a:sym typeface="Clear Sans"/>
                         </a:rPr>
-                        <a:t>Cách sử dụng</a:t>
+                        <a:t>Cách</a:t>
                       </a:r>
-                      <a:endParaRPr lang="en-US" sz="1100"/>
+                      <a:r>
+                        <a:rPr lang="en-US" sz="2400" b="1" dirty="0">
+                          <a:solidFill>
+                            <a:srgbClr val="000000"/>
+                          </a:solidFill>
+                          <a:latin typeface="Clear Sans"/>
+                          <a:ea typeface="Clear Sans"/>
+                          <a:cs typeface="Clear Sans"/>
+                          <a:sym typeface="Clear Sans"/>
+                        </a:rPr>
+                        <a:t> </a:t>
+                      </a:r>
+                      <a:r>
+                        <a:rPr lang="en-US" sz="2400" b="1" dirty="0" err="1">
+                          <a:solidFill>
+                            <a:srgbClr val="000000"/>
+                          </a:solidFill>
+                          <a:latin typeface="Clear Sans"/>
+                          <a:ea typeface="Clear Sans"/>
+                          <a:cs typeface="Clear Sans"/>
+                          <a:sym typeface="Clear Sans"/>
+                        </a:rPr>
+                        <a:t>sử</a:t>
+                      </a:r>
+                      <a:r>
+                        <a:rPr lang="en-US" sz="2400" b="1" dirty="0">
+                          <a:solidFill>
+                            <a:srgbClr val="000000"/>
+                          </a:solidFill>
+                          <a:latin typeface="Clear Sans"/>
+                          <a:ea typeface="Clear Sans"/>
+                          <a:cs typeface="Clear Sans"/>
+                          <a:sym typeface="Clear Sans"/>
+                        </a:rPr>
+                        <a:t> </a:t>
+                      </a:r>
+                      <a:r>
+                        <a:rPr lang="en-US" sz="2400" b="1" dirty="0" err="1">
+                          <a:solidFill>
+                            <a:srgbClr val="000000"/>
+                          </a:solidFill>
+                          <a:latin typeface="Clear Sans"/>
+                          <a:ea typeface="Clear Sans"/>
+                          <a:cs typeface="Clear Sans"/>
+                          <a:sym typeface="Clear Sans"/>
+                        </a:rPr>
+                        <a:t>dụng</a:t>
+                      </a:r>
+                      <a:endParaRPr lang="en-US" sz="1200" b="1" dirty="0"/>
                     </a:p>
                   </a:txBody>
                   <a:tcPr marL="190500" marR="190500" marT="190500" marB="190500" anchor="ctr">
@@ -10061,7 +12831,7 @@
                         <a:defRPr/>
                       </a:pPr>
                       <a:r>
-                        <a:rPr lang="en-US" sz="2000">
+                        <a:rPr lang="en-US" sz="2400" dirty="0" err="1">
                           <a:solidFill>
                             <a:srgbClr val="000000"/>
                           </a:solidFill>
@@ -10070,9 +12840,57 @@
                           <a:cs typeface="Clear Sans"/>
                           <a:sym typeface="Clear Sans"/>
                         </a:rPr>
-                        <a:t>Phải import từ repo YOLOv5</a:t>
+                        <a:t>Phải</a:t>
                       </a:r>
-                      <a:endParaRPr lang="en-US" sz="1100"/>
+                      <a:r>
+                        <a:rPr lang="en-US" sz="2400" dirty="0">
+                          <a:solidFill>
+                            <a:srgbClr val="000000"/>
+                          </a:solidFill>
+                          <a:latin typeface="Clear Sans"/>
+                          <a:ea typeface="Clear Sans"/>
+                          <a:cs typeface="Clear Sans"/>
+                          <a:sym typeface="Clear Sans"/>
+                        </a:rPr>
+                        <a:t> import </a:t>
+                      </a:r>
+                      <a:r>
+                        <a:rPr lang="en-US" sz="2400" dirty="0" err="1">
+                          <a:solidFill>
+                            <a:srgbClr val="000000"/>
+                          </a:solidFill>
+                          <a:latin typeface="Clear Sans"/>
+                          <a:ea typeface="Clear Sans"/>
+                          <a:cs typeface="Clear Sans"/>
+                          <a:sym typeface="Clear Sans"/>
+                        </a:rPr>
+                        <a:t>từ</a:t>
+                      </a:r>
+                      <a:r>
+                        <a:rPr lang="en-US" sz="2400" dirty="0">
+                          <a:solidFill>
+                            <a:srgbClr val="000000"/>
+                          </a:solidFill>
+                          <a:latin typeface="Clear Sans"/>
+                          <a:ea typeface="Clear Sans"/>
+                          <a:cs typeface="Clear Sans"/>
+                          <a:sym typeface="Clear Sans"/>
+                        </a:rPr>
+                        <a:t> repo </a:t>
+                      </a:r>
+                      <a:r>
+                        <a:rPr lang="en-US" sz="2400" dirty="0" err="1">
+                          <a:solidFill>
+                            <a:srgbClr val="000000"/>
+                          </a:solidFill>
+                          <a:latin typeface="Clear Sans"/>
+                          <a:ea typeface="Clear Sans"/>
+                          <a:cs typeface="Clear Sans"/>
+                          <a:sym typeface="Clear Sans"/>
+                        </a:rPr>
+                        <a:t>YOLOv5</a:t>
+                      </a:r>
+                      <a:endParaRPr lang="en-US" sz="1200" dirty="0"/>
                     </a:p>
                   </a:txBody>
                   <a:tcPr marL="190500" marR="190500" marT="190500" marB="190500" anchor="ctr">
@@ -10126,7 +12944,7 @@
                         <a:defRPr/>
                       </a:pPr>
                       <a:r>
-                        <a:rPr lang="en-US" sz="2000">
+                        <a:rPr lang="en-US" sz="2400">
                           <a:solidFill>
                             <a:srgbClr val="000000"/>
                           </a:solidFill>
@@ -10137,7 +12955,7 @@
                         </a:rPr>
                         <a:t>Dùng trực tiếp với thư viện ultralytics</a:t>
                       </a:r>
-                      <a:endParaRPr lang="en-US" sz="1100"/>
+                      <a:endParaRPr lang="en-US" sz="1200"/>
                     </a:p>
                   </a:txBody>
                   <a:tcPr marL="190500" marR="190500" marT="190500" marB="190500" anchor="ctr">
@@ -10198,7 +13016,7 @@
                         <a:defRPr/>
                       </a:pPr>
                       <a:r>
-                        <a:rPr lang="en-US" sz="1899">
+                        <a:rPr lang="en-US" sz="2400" b="1" dirty="0" err="1">
                           <a:solidFill>
                             <a:srgbClr val="000000"/>
                           </a:solidFill>
@@ -10207,9 +13025,81 @@
                           <a:cs typeface="Clear Sans"/>
                           <a:sym typeface="Clear Sans"/>
                         </a:rPr>
-                        <a:t>Tích hợp tính năng</a:t>
+                        <a:t>Tích</a:t>
                       </a:r>
-                      <a:endParaRPr lang="en-US" sz="1100"/>
+                      <a:r>
+                        <a:rPr lang="en-US" sz="2400" b="1" dirty="0">
+                          <a:solidFill>
+                            <a:srgbClr val="000000"/>
+                          </a:solidFill>
+                          <a:latin typeface="Clear Sans"/>
+                          <a:ea typeface="Clear Sans"/>
+                          <a:cs typeface="Clear Sans"/>
+                          <a:sym typeface="Clear Sans"/>
+                        </a:rPr>
+                        <a:t> </a:t>
+                      </a:r>
+                      <a:r>
+                        <a:rPr lang="en-US" sz="2400" b="1" dirty="0" err="1">
+                          <a:solidFill>
+                            <a:srgbClr val="000000"/>
+                          </a:solidFill>
+                          <a:latin typeface="Clear Sans"/>
+                          <a:ea typeface="Clear Sans"/>
+                          <a:cs typeface="Clear Sans"/>
+                          <a:sym typeface="Clear Sans"/>
+                        </a:rPr>
+                        <a:t>hợp</a:t>
+                      </a:r>
+                      <a:r>
+                        <a:rPr lang="en-US" sz="2400" b="1" dirty="0">
+                          <a:solidFill>
+                            <a:srgbClr val="000000"/>
+                          </a:solidFill>
+                          <a:latin typeface="Clear Sans"/>
+                          <a:ea typeface="Clear Sans"/>
+                          <a:cs typeface="Clear Sans"/>
+                          <a:sym typeface="Clear Sans"/>
+                        </a:rPr>
+                        <a:t> </a:t>
+                      </a:r>
+                      <a:r>
+                        <a:rPr lang="en-US" sz="2400" b="1" dirty="0" err="1">
+                          <a:solidFill>
+                            <a:srgbClr val="000000"/>
+                          </a:solidFill>
+                          <a:latin typeface="Clear Sans"/>
+                          <a:ea typeface="Clear Sans"/>
+                          <a:cs typeface="Clear Sans"/>
+                          <a:sym typeface="Clear Sans"/>
+                        </a:rPr>
+                        <a:t>tính</a:t>
+                      </a:r>
+                      <a:r>
+                        <a:rPr lang="en-US" sz="2400" b="1" dirty="0">
+                          <a:solidFill>
+                            <a:srgbClr val="000000"/>
+                          </a:solidFill>
+                          <a:latin typeface="Clear Sans"/>
+                          <a:ea typeface="Clear Sans"/>
+                          <a:cs typeface="Clear Sans"/>
+                          <a:sym typeface="Clear Sans"/>
+                        </a:rPr>
+                        <a:t> </a:t>
+                      </a:r>
+                      <a:r>
+                        <a:rPr lang="en-US" sz="2400" b="1" dirty="0" err="1">
+                          <a:solidFill>
+                            <a:srgbClr val="000000"/>
+                          </a:solidFill>
+                          <a:latin typeface="Clear Sans"/>
+                          <a:ea typeface="Clear Sans"/>
+                          <a:cs typeface="Clear Sans"/>
+                          <a:sym typeface="Clear Sans"/>
+                        </a:rPr>
+                        <a:t>năng</a:t>
+                      </a:r>
+                      <a:endParaRPr lang="en-US" sz="2400" b="1" dirty="0"/>
                     </a:p>
                   </a:txBody>
                   <a:tcPr marL="190500" marR="190500" marT="190500" marB="190500" anchor="ctr">
@@ -10263,7 +13153,7 @@
                         <a:defRPr/>
                       </a:pPr>
                       <a:r>
-                        <a:rPr lang="en-US" sz="2000">
+                        <a:rPr lang="en-US" sz="2400" dirty="0" err="1">
                           <a:solidFill>
                             <a:srgbClr val="000000"/>
                           </a:solidFill>
@@ -10272,9 +13162,45 @@
                           <a:cs typeface="Clear Sans"/>
                           <a:sym typeface="Clear Sans"/>
                         </a:rPr>
-                        <a:t>Chỉ có object detection</a:t>
+                        <a:t>Chỉ</a:t>
                       </a:r>
-                      <a:endParaRPr lang="en-US" sz="1100"/>
+                      <a:r>
+                        <a:rPr lang="en-US" sz="2400" dirty="0">
+                          <a:solidFill>
+                            <a:srgbClr val="000000"/>
+                          </a:solidFill>
+                          <a:latin typeface="Clear Sans"/>
+                          <a:ea typeface="Clear Sans"/>
+                          <a:cs typeface="Clear Sans"/>
+                          <a:sym typeface="Clear Sans"/>
+                        </a:rPr>
+                        <a:t> </a:t>
+                      </a:r>
+                      <a:r>
+                        <a:rPr lang="en-US" sz="2400" dirty="0" err="1">
+                          <a:solidFill>
+                            <a:srgbClr val="000000"/>
+                          </a:solidFill>
+                          <a:latin typeface="Clear Sans"/>
+                          <a:ea typeface="Clear Sans"/>
+                          <a:cs typeface="Clear Sans"/>
+                          <a:sym typeface="Clear Sans"/>
+                        </a:rPr>
+                        <a:t>có</a:t>
+                      </a:r>
+                      <a:r>
+                        <a:rPr lang="en-US" sz="2400" dirty="0">
+                          <a:solidFill>
+                            <a:srgbClr val="000000"/>
+                          </a:solidFill>
+                          <a:latin typeface="Clear Sans"/>
+                          <a:ea typeface="Clear Sans"/>
+                          <a:cs typeface="Clear Sans"/>
+                          <a:sym typeface="Clear Sans"/>
+                        </a:rPr>
+                        <a:t> object detection</a:t>
+                      </a:r>
+                      <a:endParaRPr lang="en-US" sz="1200" dirty="0"/>
                     </a:p>
                   </a:txBody>
                   <a:tcPr marL="190500" marR="190500" marT="190500" marB="190500" anchor="ctr">
@@ -10328,7 +13254,7 @@
                         <a:defRPr/>
                       </a:pPr>
                       <a:r>
-                        <a:rPr lang="en-US" sz="2000">
+                        <a:rPr lang="en-US" sz="2400">
                           <a:solidFill>
                             <a:srgbClr val="000000"/>
                           </a:solidFill>
@@ -10339,7 +13265,7 @@
                         </a:rPr>
                         <a:t>Có detection, segmentation, pose, tracking</a:t>
                       </a:r>
-                      <a:endParaRPr lang="en-US" sz="1100"/>
+                      <a:endParaRPr lang="en-US" sz="1200"/>
                     </a:p>
                   </a:txBody>
                   <a:tcPr marL="190500" marR="190500" marT="190500" marB="190500" anchor="ctr">
@@ -10400,7 +13326,7 @@
                         <a:defRPr/>
                       </a:pPr>
                       <a:r>
-                        <a:rPr lang="en-US" sz="2000">
+                        <a:rPr lang="en-US" sz="2400" b="1" dirty="0">
                           <a:solidFill>
                             <a:srgbClr val="000000"/>
                           </a:solidFill>
@@ -10409,9 +13335,93 @@
                           <a:cs typeface="Clear Sans"/>
                           <a:sym typeface="Clear Sans"/>
                         </a:rPr>
-                        <a:t> Tốc độ &amp; hiệu suất</a:t>
+                        <a:t> </a:t>
                       </a:r>
-                      <a:endParaRPr lang="en-US" sz="1100"/>
+                      <a:r>
+                        <a:rPr lang="en-US" sz="2400" b="1" dirty="0" err="1">
+                          <a:solidFill>
+                            <a:srgbClr val="000000"/>
+                          </a:solidFill>
+                          <a:latin typeface="Clear Sans"/>
+                          <a:ea typeface="Clear Sans"/>
+                          <a:cs typeface="Clear Sans"/>
+                          <a:sym typeface="Clear Sans"/>
+                        </a:rPr>
+                        <a:t>Tốc</a:t>
+                      </a:r>
+                      <a:r>
+                        <a:rPr lang="en-US" sz="2400" b="1" dirty="0">
+                          <a:solidFill>
+                            <a:srgbClr val="000000"/>
+                          </a:solidFill>
+                          <a:latin typeface="Clear Sans"/>
+                          <a:ea typeface="Clear Sans"/>
+                          <a:cs typeface="Clear Sans"/>
+                          <a:sym typeface="Clear Sans"/>
+                        </a:rPr>
+                        <a:t> </a:t>
+                      </a:r>
+                      <a:r>
+                        <a:rPr lang="en-US" sz="2400" b="1" dirty="0" err="1">
+                          <a:solidFill>
+                            <a:srgbClr val="000000"/>
+                          </a:solidFill>
+                          <a:latin typeface="Clear Sans"/>
+                          <a:ea typeface="Clear Sans"/>
+                          <a:cs typeface="Clear Sans"/>
+                          <a:sym typeface="Clear Sans"/>
+                        </a:rPr>
+                        <a:t>độ</a:t>
+                      </a:r>
+                      <a:r>
+                        <a:rPr lang="en-US" sz="2400" b="1" dirty="0">
+                          <a:solidFill>
+                            <a:srgbClr val="000000"/>
+                          </a:solidFill>
+                          <a:latin typeface="Clear Sans"/>
+                          <a:ea typeface="Clear Sans"/>
+                          <a:cs typeface="Clear Sans"/>
+                          <a:sym typeface="Clear Sans"/>
+                        </a:rPr>
+                        <a:t> &amp; </a:t>
+                      </a:r>
+                      <a:r>
+                        <a:rPr lang="en-US" sz="2400" b="1" dirty="0" err="1">
+                          <a:solidFill>
+                            <a:srgbClr val="000000"/>
+                          </a:solidFill>
+                          <a:latin typeface="Clear Sans"/>
+                          <a:ea typeface="Clear Sans"/>
+                          <a:cs typeface="Clear Sans"/>
+                          <a:sym typeface="Clear Sans"/>
+                        </a:rPr>
+                        <a:t>hiệu</a:t>
+                      </a:r>
+                      <a:r>
+                        <a:rPr lang="en-US" sz="2400" b="1" dirty="0">
+                          <a:solidFill>
+                            <a:srgbClr val="000000"/>
+                          </a:solidFill>
+                          <a:latin typeface="Clear Sans"/>
+                          <a:ea typeface="Clear Sans"/>
+                          <a:cs typeface="Clear Sans"/>
+                          <a:sym typeface="Clear Sans"/>
+                        </a:rPr>
+                        <a:t> </a:t>
+                      </a:r>
+                      <a:r>
+                        <a:rPr lang="en-US" sz="2400" b="1" dirty="0" err="1">
+                          <a:solidFill>
+                            <a:srgbClr val="000000"/>
+                          </a:solidFill>
+                          <a:latin typeface="Clear Sans"/>
+                          <a:ea typeface="Clear Sans"/>
+                          <a:cs typeface="Clear Sans"/>
+                          <a:sym typeface="Clear Sans"/>
+                        </a:rPr>
+                        <a:t>suất</a:t>
+                      </a:r>
+                      <a:endParaRPr lang="en-US" sz="1200" b="1" dirty="0"/>
                     </a:p>
                   </a:txBody>
                   <a:tcPr marL="190500" marR="190500" marT="190500" marB="190500" anchor="ctr">
@@ -10465,7 +13475,7 @@
                         <a:defRPr/>
                       </a:pPr>
                       <a:r>
-                        <a:rPr lang="en-US" sz="2000">
+                        <a:rPr lang="en-US" sz="2400">
                           <a:solidFill>
                             <a:srgbClr val="000000"/>
                           </a:solidFill>
@@ -10476,7 +13486,7 @@
                         </a:rPr>
                         <a:t>Tốt</a:t>
                       </a:r>
-                      <a:endParaRPr lang="en-US" sz="1100"/>
+                      <a:endParaRPr lang="en-US" sz="1200"/>
                     </a:p>
                   </a:txBody>
                   <a:tcPr marL="190500" marR="190500" marT="190500" marB="190500" anchor="ctr">
@@ -10530,7 +13540,7 @@
                         <a:defRPr/>
                       </a:pPr>
                       <a:r>
-                        <a:rPr lang="en-US" sz="2000">
+                        <a:rPr lang="en-US" sz="2400" dirty="0">
                           <a:solidFill>
                             <a:srgbClr val="000000"/>
                           </a:solidFill>
@@ -10539,9 +13549,165 @@
                           <a:cs typeface="Clear Sans"/>
                           <a:sym typeface="Clear Sans"/>
                         </a:rPr>
-                        <a:t>	Tốt hơn, nhẹ và chính xác hơn</a:t>
+                        <a:t>	</a:t>
                       </a:r>
-                      <a:endParaRPr lang="en-US" sz="1100"/>
+                      <a:r>
+                        <a:rPr lang="en-US" sz="2400" dirty="0" err="1">
+                          <a:solidFill>
+                            <a:srgbClr val="000000"/>
+                          </a:solidFill>
+                          <a:latin typeface="Clear Sans"/>
+                          <a:ea typeface="Clear Sans"/>
+                          <a:cs typeface="Clear Sans"/>
+                          <a:sym typeface="Clear Sans"/>
+                        </a:rPr>
+                        <a:t>Tốt</a:t>
+                      </a:r>
+                      <a:r>
+                        <a:rPr lang="en-US" sz="2400" dirty="0">
+                          <a:solidFill>
+                            <a:srgbClr val="000000"/>
+                          </a:solidFill>
+                          <a:latin typeface="Clear Sans"/>
+                          <a:ea typeface="Clear Sans"/>
+                          <a:cs typeface="Clear Sans"/>
+                          <a:sym typeface="Clear Sans"/>
+                        </a:rPr>
+                        <a:t> </a:t>
+                      </a:r>
+                      <a:r>
+                        <a:rPr lang="en-US" sz="2400" dirty="0" err="1">
+                          <a:solidFill>
+                            <a:srgbClr val="000000"/>
+                          </a:solidFill>
+                          <a:latin typeface="Clear Sans"/>
+                          <a:ea typeface="Clear Sans"/>
+                          <a:cs typeface="Clear Sans"/>
+                          <a:sym typeface="Clear Sans"/>
+                        </a:rPr>
+                        <a:t>hơn</a:t>
+                      </a:r>
+                      <a:r>
+                        <a:rPr lang="en-US" sz="2400" dirty="0">
+                          <a:solidFill>
+                            <a:srgbClr val="000000"/>
+                          </a:solidFill>
+                          <a:latin typeface="Clear Sans"/>
+                          <a:ea typeface="Clear Sans"/>
+                          <a:cs typeface="Clear Sans"/>
+                          <a:sym typeface="Clear Sans"/>
+                        </a:rPr>
+                        <a:t>, </a:t>
+                      </a:r>
+                      <a:r>
+                        <a:rPr lang="en-US" sz="2400" dirty="0" err="1">
+                          <a:solidFill>
+                            <a:srgbClr val="000000"/>
+                          </a:solidFill>
+                          <a:latin typeface="Clear Sans"/>
+                          <a:ea typeface="Clear Sans"/>
+                          <a:cs typeface="Clear Sans"/>
+                          <a:sym typeface="Clear Sans"/>
+                        </a:rPr>
+                        <a:t>nhẹ</a:t>
+                      </a:r>
+                      <a:r>
+                        <a:rPr lang="en-US" sz="2400" dirty="0">
+                          <a:solidFill>
+                            <a:srgbClr val="000000"/>
+                          </a:solidFill>
+                          <a:latin typeface="Clear Sans"/>
+                          <a:ea typeface="Clear Sans"/>
+                          <a:cs typeface="Clear Sans"/>
+                          <a:sym typeface="Clear Sans"/>
+                        </a:rPr>
+                        <a:t> </a:t>
+                      </a:r>
+                      <a:r>
+                        <a:rPr lang="en-US" sz="2400" dirty="0" err="1">
+                          <a:solidFill>
+                            <a:srgbClr val="000000"/>
+                          </a:solidFill>
+                          <a:latin typeface="Clear Sans"/>
+                          <a:ea typeface="Clear Sans"/>
+                          <a:cs typeface="Clear Sans"/>
+                          <a:sym typeface="Clear Sans"/>
+                        </a:rPr>
+                        <a:t>và</a:t>
+                      </a:r>
+                      <a:r>
+                        <a:rPr lang="en-US" sz="2400" dirty="0">
+                          <a:solidFill>
+                            <a:srgbClr val="000000"/>
+                          </a:solidFill>
+                          <a:latin typeface="Clear Sans"/>
+                          <a:ea typeface="Clear Sans"/>
+                          <a:cs typeface="Clear Sans"/>
+                          <a:sym typeface="Clear Sans"/>
+                        </a:rPr>
+                        <a:t> </a:t>
+                      </a:r>
+                      <a:r>
+                        <a:rPr lang="en-US" sz="2400" dirty="0" err="1">
+                          <a:solidFill>
+                            <a:srgbClr val="000000"/>
+                          </a:solidFill>
+                          <a:latin typeface="Clear Sans"/>
+                          <a:ea typeface="Clear Sans"/>
+                          <a:cs typeface="Clear Sans"/>
+                          <a:sym typeface="Clear Sans"/>
+                        </a:rPr>
+                        <a:t>chính</a:t>
+                      </a:r>
+                      <a:r>
+                        <a:rPr lang="en-US" sz="2400" dirty="0">
+                          <a:solidFill>
+                            <a:srgbClr val="000000"/>
+                          </a:solidFill>
+                          <a:latin typeface="Clear Sans"/>
+                          <a:ea typeface="Clear Sans"/>
+                          <a:cs typeface="Clear Sans"/>
+                          <a:sym typeface="Clear Sans"/>
+                        </a:rPr>
+                        <a:t> </a:t>
+                      </a:r>
+                      <a:r>
+                        <a:rPr lang="en-US" sz="2400" dirty="0" err="1">
+                          <a:solidFill>
+                            <a:srgbClr val="000000"/>
+                          </a:solidFill>
+                          <a:latin typeface="Clear Sans"/>
+                          <a:ea typeface="Clear Sans"/>
+                          <a:cs typeface="Clear Sans"/>
+                          <a:sym typeface="Clear Sans"/>
+                        </a:rPr>
+                        <a:t>xác</a:t>
+                      </a:r>
+                      <a:r>
+                        <a:rPr lang="en-US" sz="2400" dirty="0">
+                          <a:solidFill>
+                            <a:srgbClr val="000000"/>
+                          </a:solidFill>
+                          <a:latin typeface="Clear Sans"/>
+                          <a:ea typeface="Clear Sans"/>
+                          <a:cs typeface="Clear Sans"/>
+                          <a:sym typeface="Clear Sans"/>
+                        </a:rPr>
+                        <a:t> </a:t>
+                      </a:r>
+                      <a:r>
+                        <a:rPr lang="en-US" sz="2400" dirty="0" err="1">
+                          <a:solidFill>
+                            <a:srgbClr val="000000"/>
+                          </a:solidFill>
+                          <a:latin typeface="Clear Sans"/>
+                          <a:ea typeface="Clear Sans"/>
+                          <a:cs typeface="Clear Sans"/>
+                          <a:sym typeface="Clear Sans"/>
+                        </a:rPr>
+                        <a:t>hơn</a:t>
+                      </a:r>
+                      <a:endParaRPr lang="en-US" sz="1200" dirty="0"/>
                     </a:p>
                   </a:txBody>
                   <a:tcPr marL="190500" marR="190500" marT="190500" marB="190500" anchor="ctr">
